--- a/presentations/energy_hunter_pitch.pptx
+++ b/presentations/energy_hunter_pitch.pptx
@@ -15,6 +15,8 @@
     <p:sldId id="263" r:id="rId14"/>
     <p:sldId id="264" r:id="rId15"/>
     <p:sldId id="265" r:id="rId16"/>
+    <p:sldId id="266" r:id="rId17"/>
+    <p:sldId id="267" r:id="rId18"/>
   </p:sldIdLst>
   <p:sldSz cx="12191695" cy="6858000" type="screen4x3"/>
   <p:notesSz cx="6858000" cy="9144000"/>
@@ -3459,6 +3461,738 @@
             <a:avLst/>
           </a:prstGeom>
           <a:solidFill>
+            <a:srgbClr val="F5EFE0"/>
+          </a:solidFill>
+          <a:ln>
+            <a:noFill/>
+          </a:ln>
+          <a:effectLst/>
+        </p:spPr>
+        <p:style>
+          <a:lnRef idx="1">
+            <a:schemeClr val="accent1"/>
+          </a:lnRef>
+          <a:fillRef idx="3">
+            <a:schemeClr val="accent1"/>
+          </a:fillRef>
+          <a:effectRef idx="2">
+            <a:schemeClr val="accent1"/>
+          </a:effectRef>
+          <a:fontRef idx="minor">
+            <a:schemeClr val="lt1"/>
+          </a:fontRef>
+        </p:style>
+        <p:txBody>
+          <a:bodyPr rtlCol="0" anchor="ctr"/>
+          <a:lstStyle/>
+          <a:p>
+            <a:pPr algn="ctr"/>
+          </a:p>
+        </p:txBody>
+      </p:sp>
+      <p:sp>
+        <p:nvSpPr>
+          <p:cNvPr id="3" name="Rectangle 2"/>
+          <p:cNvSpPr/>
+          <p:nvPr/>
+        </p:nvSpPr>
+        <p:spPr>
+          <a:xfrm>
+            <a:off x="0" y="0"/>
+            <a:ext cx="320040" cy="6858000"/>
+          </a:xfrm>
+          <a:prstGeom prst="rect">
+            <a:avLst/>
+          </a:prstGeom>
+          <a:solidFill>
+            <a:srgbClr val="104F3A"/>
+          </a:solidFill>
+          <a:ln>
+            <a:noFill/>
+          </a:ln>
+        </p:spPr>
+        <p:style>
+          <a:lnRef idx="1">
+            <a:schemeClr val="accent1"/>
+          </a:lnRef>
+          <a:fillRef idx="3">
+            <a:schemeClr val="accent1"/>
+          </a:fillRef>
+          <a:effectRef idx="2">
+            <a:schemeClr val="accent1"/>
+          </a:effectRef>
+          <a:fontRef idx="minor">
+            <a:schemeClr val="lt1"/>
+          </a:fontRef>
+        </p:style>
+        <p:txBody>
+          <a:bodyPr rtlCol="0" anchor="ctr"/>
+          <a:lstStyle/>
+          <a:p>
+            <a:pPr algn="ctr"/>
+          </a:p>
+        </p:txBody>
+      </p:sp>
+      <p:sp>
+        <p:nvSpPr>
+          <p:cNvPr id="4" name="TextBox 3"/>
+          <p:cNvSpPr txBox="1"/>
+          <p:nvPr/>
+        </p:nvSpPr>
+        <p:spPr>
+          <a:xfrm>
+            <a:off x="640080" y="457200"/>
+            <a:ext cx="10972800" cy="365760"/>
+          </a:xfrm>
+          <a:prstGeom prst="rect">
+            <a:avLst/>
+          </a:prstGeom>
+          <a:noFill/>
+        </p:spPr>
+        <p:txBody>
+          <a:bodyPr wrap="square" anchor="t" lIns="0" rIns="0" tIns="0" bIns="0">
+            <a:spAutoFit/>
+          </a:bodyPr>
+          <a:lstStyle/>
+          <a:p>
+            <a:pPr algn="l"/>
+            <a:r>
+              <a:rPr sz="1200" b="1">
+                <a:solidFill>
+                  <a:srgbClr val="2E8B57"/>
+                </a:solidFill>
+                <a:latin typeface="Calibri"/>
+              </a:rPr>
+              <a:t>HACIA DÓNDE VA</a:t>
+            </a:r>
+          </a:p>
+        </p:txBody>
+      </p:sp>
+      <p:sp>
+        <p:nvSpPr>
+          <p:cNvPr id="5" name="TextBox 4"/>
+          <p:cNvSpPr txBox="1"/>
+          <p:nvPr/>
+        </p:nvSpPr>
+        <p:spPr>
+          <a:xfrm>
+            <a:off x="640080" y="777240"/>
+            <a:ext cx="10972800" cy="822960"/>
+          </a:xfrm>
+          <a:prstGeom prst="rect">
+            <a:avLst/>
+          </a:prstGeom>
+          <a:noFill/>
+        </p:spPr>
+        <p:txBody>
+          <a:bodyPr wrap="square" anchor="t" lIns="0" rIns="0" tIns="0" bIns="0">
+            <a:spAutoFit/>
+          </a:bodyPr>
+          <a:lstStyle/>
+          <a:p>
+            <a:pPr algn="l"/>
+            <a:r>
+              <a:rPr sz="3400" b="1">
+                <a:solidFill>
+                  <a:srgbClr val="104F3A"/>
+                </a:solidFill>
+                <a:latin typeface="Calibri"/>
+              </a:rPr>
+              <a:t>Roadmap del MVP al producto</a:t>
+            </a:r>
+          </a:p>
+        </p:txBody>
+      </p:sp>
+      <p:sp>
+        <p:nvSpPr>
+          <p:cNvPr id="6" name="TextBox 5"/>
+          <p:cNvSpPr txBox="1"/>
+          <p:nvPr/>
+        </p:nvSpPr>
+        <p:spPr>
+          <a:xfrm>
+            <a:off x="640080" y="1554480"/>
+            <a:ext cx="10972800" cy="548640"/>
+          </a:xfrm>
+          <a:prstGeom prst="rect">
+            <a:avLst/>
+          </a:prstGeom>
+          <a:noFill/>
+        </p:spPr>
+        <p:txBody>
+          <a:bodyPr wrap="square" anchor="t" lIns="0" rIns="0" tIns="0" bIns="0">
+            <a:spAutoFit/>
+          </a:bodyPr>
+          <a:lstStyle/>
+          <a:p>
+            <a:pPr algn="l"/>
+            <a:r>
+              <a:rPr sz="1800" b="0">
+                <a:solidFill>
+                  <a:srgbClr val="4B5A52"/>
+                </a:solidFill>
+                <a:latin typeface="Calibri"/>
+              </a:rPr>
+              <a:t>Hoy: hackathon. Mañana: piloto real con breakers físicos.</a:t>
+            </a:r>
+          </a:p>
+        </p:txBody>
+      </p:sp>
+      <p:sp>
+        <p:nvSpPr>
+          <p:cNvPr id="7" name="TextBox 6"/>
+          <p:cNvSpPr txBox="1"/>
+          <p:nvPr/>
+        </p:nvSpPr>
+        <p:spPr>
+          <a:xfrm>
+            <a:off x="457200" y="6446520"/>
+            <a:ext cx="7315200" cy="320040"/>
+          </a:xfrm>
+          <a:prstGeom prst="rect">
+            <a:avLst/>
+          </a:prstGeom>
+          <a:noFill/>
+        </p:spPr>
+        <p:txBody>
+          <a:bodyPr wrap="square" anchor="t" lIns="0" rIns="0" tIns="0" bIns="0">
+            <a:spAutoFit/>
+          </a:bodyPr>
+          <a:lstStyle/>
+          <a:p>
+            <a:pPr algn="l"/>
+            <a:r>
+              <a:rPr sz="1100" b="0">
+                <a:solidFill>
+                  <a:srgbClr val="4B5A52"/>
+                </a:solidFill>
+                <a:latin typeface="Calibri"/>
+              </a:rPr>
+              <a:t>Energy Hunter · Hackathon Demo</a:t>
+            </a:r>
+          </a:p>
+        </p:txBody>
+      </p:sp>
+      <p:sp>
+        <p:nvSpPr>
+          <p:cNvPr id="8" name="TextBox 7"/>
+          <p:cNvSpPr txBox="1"/>
+          <p:nvPr/>
+        </p:nvSpPr>
+        <p:spPr>
+          <a:xfrm>
+            <a:off x="10515600" y="6446520"/>
+            <a:ext cx="1280160" cy="320040"/>
+          </a:xfrm>
+          <a:prstGeom prst="rect">
+            <a:avLst/>
+          </a:prstGeom>
+          <a:noFill/>
+        </p:spPr>
+        <p:txBody>
+          <a:bodyPr wrap="square" anchor="t" lIns="0" rIns="0" tIns="0" bIns="0">
+            <a:spAutoFit/>
+          </a:bodyPr>
+          <a:lstStyle/>
+          <a:p>
+            <a:pPr algn="r"/>
+            <a:r>
+              <a:rPr sz="1100" b="0">
+                <a:solidFill>
+                  <a:srgbClr val="4B5A52"/>
+                </a:solidFill>
+                <a:latin typeface="Calibri"/>
+              </a:rPr>
+              <a:t>10 / 12</a:t>
+            </a:r>
+          </a:p>
+        </p:txBody>
+      </p:sp>
+      <p:pic>
+        <p:nvPicPr>
+          <p:cNvPr id="9" name="Picture 8" descr="roadmap.png"/>
+          <p:cNvPicPr>
+            <a:picLocks noChangeAspect="1"/>
+          </p:cNvPicPr>
+          <p:nvPr/>
+        </p:nvPicPr>
+        <p:blipFill>
+          <a:blip r:embed="rId2"/>
+          <a:stretch>
+            <a:fillRect/>
+          </a:stretch>
+        </p:blipFill>
+        <p:spPr>
+          <a:xfrm>
+            <a:off x="457200" y="2286000"/>
+            <a:ext cx="11247120" cy="4016829"/>
+          </a:xfrm>
+          <a:prstGeom prst="rect">
+            <a:avLst/>
+          </a:prstGeom>
+        </p:spPr>
+      </p:pic>
+    </p:spTree>
+  </p:cSld>
+  <p:clrMapOvr>
+    <a:masterClrMapping/>
+  </p:clrMapOvr>
+</p:sld>
+</file>
+
+<file path=ppt/slides/slide11.xml><?xml version="1.0" encoding="utf-8"?>
+<p:sld xmlns:a="http://schemas.openxmlformats.org/drawingml/2006/main" xmlns:p="http://schemas.openxmlformats.org/presentationml/2006/main" xmlns:r="http://schemas.openxmlformats.org/officeDocument/2006/relationships">
+  <p:cSld>
+    <p:spTree>
+      <p:nvGrpSpPr>
+        <p:cNvPr id="1" name=""/>
+        <p:cNvGrpSpPr/>
+        <p:nvPr/>
+      </p:nvGrpSpPr>
+      <p:grpSpPr/>
+      <p:sp>
+        <p:nvSpPr>
+          <p:cNvPr id="2" name="Rectangle 1"/>
+          <p:cNvSpPr/>
+          <p:nvPr/>
+        </p:nvSpPr>
+        <p:spPr>
+          <a:xfrm>
+            <a:off x="0" y="0"/>
+            <a:ext cx="12191695" cy="6858000"/>
+          </a:xfrm>
+          <a:prstGeom prst="rect">
+            <a:avLst/>
+          </a:prstGeom>
+          <a:solidFill>
+            <a:srgbClr val="F5EFE0"/>
+          </a:solidFill>
+          <a:ln>
+            <a:noFill/>
+          </a:ln>
+          <a:effectLst/>
+        </p:spPr>
+        <p:style>
+          <a:lnRef idx="1">
+            <a:schemeClr val="accent1"/>
+          </a:lnRef>
+          <a:fillRef idx="3">
+            <a:schemeClr val="accent1"/>
+          </a:fillRef>
+          <a:effectRef idx="2">
+            <a:schemeClr val="accent1"/>
+          </a:effectRef>
+          <a:fontRef idx="minor">
+            <a:schemeClr val="lt1"/>
+          </a:fontRef>
+        </p:style>
+        <p:txBody>
+          <a:bodyPr rtlCol="0" anchor="ctr"/>
+          <a:lstStyle/>
+          <a:p>
+            <a:pPr algn="ctr"/>
+          </a:p>
+        </p:txBody>
+      </p:sp>
+      <p:sp>
+        <p:nvSpPr>
+          <p:cNvPr id="3" name="Rectangle 2"/>
+          <p:cNvSpPr/>
+          <p:nvPr/>
+        </p:nvSpPr>
+        <p:spPr>
+          <a:xfrm>
+            <a:off x="0" y="0"/>
+            <a:ext cx="320040" cy="6858000"/>
+          </a:xfrm>
+          <a:prstGeom prst="rect">
+            <a:avLst/>
+          </a:prstGeom>
+          <a:solidFill>
+            <a:srgbClr val="104F3A"/>
+          </a:solidFill>
+          <a:ln>
+            <a:noFill/>
+          </a:ln>
+        </p:spPr>
+        <p:style>
+          <a:lnRef idx="1">
+            <a:schemeClr val="accent1"/>
+          </a:lnRef>
+          <a:fillRef idx="3">
+            <a:schemeClr val="accent1"/>
+          </a:fillRef>
+          <a:effectRef idx="2">
+            <a:schemeClr val="accent1"/>
+          </a:effectRef>
+          <a:fontRef idx="minor">
+            <a:schemeClr val="lt1"/>
+          </a:fontRef>
+        </p:style>
+        <p:txBody>
+          <a:bodyPr rtlCol="0" anchor="ctr"/>
+          <a:lstStyle/>
+          <a:p>
+            <a:pPr algn="ctr"/>
+          </a:p>
+        </p:txBody>
+      </p:sp>
+      <p:sp>
+        <p:nvSpPr>
+          <p:cNvPr id="4" name="TextBox 3"/>
+          <p:cNvSpPr txBox="1"/>
+          <p:nvPr/>
+        </p:nvSpPr>
+        <p:spPr>
+          <a:xfrm>
+            <a:off x="640080" y="457200"/>
+            <a:ext cx="10972800" cy="365760"/>
+          </a:xfrm>
+          <a:prstGeom prst="rect">
+            <a:avLst/>
+          </a:prstGeom>
+          <a:noFill/>
+        </p:spPr>
+        <p:txBody>
+          <a:bodyPr wrap="square" anchor="t" lIns="0" rIns="0" tIns="0" bIns="0">
+            <a:spAutoFit/>
+          </a:bodyPr>
+          <a:lstStyle/>
+          <a:p>
+            <a:pPr algn="l"/>
+            <a:r>
+              <a:rPr sz="1200" b="1">
+                <a:solidFill>
+                  <a:srgbClr val="2E8B57"/>
+                </a:solidFill>
+                <a:latin typeface="Calibri"/>
+              </a:rPr>
+              <a:t>FRENTE A ALTERNATIVAS</a:t>
+            </a:r>
+          </a:p>
+        </p:txBody>
+      </p:sp>
+      <p:sp>
+        <p:nvSpPr>
+          <p:cNvPr id="5" name="TextBox 4"/>
+          <p:cNvSpPr txBox="1"/>
+          <p:nvPr/>
+        </p:nvSpPr>
+        <p:spPr>
+          <a:xfrm>
+            <a:off x="640080" y="777240"/>
+            <a:ext cx="10972800" cy="822960"/>
+          </a:xfrm>
+          <a:prstGeom prst="rect">
+            <a:avLst/>
+          </a:prstGeom>
+          <a:noFill/>
+        </p:spPr>
+        <p:txBody>
+          <a:bodyPr wrap="square" anchor="t" lIns="0" rIns="0" tIns="0" bIns="0">
+            <a:spAutoFit/>
+          </a:bodyPr>
+          <a:lstStyle/>
+          <a:p>
+            <a:pPr algn="l"/>
+            <a:r>
+              <a:rPr sz="3400" b="1">
+                <a:solidFill>
+                  <a:srgbClr val="104F3A"/>
+                </a:solidFill>
+                <a:latin typeface="Calibri"/>
+              </a:rPr>
+              <a:t>Lo que nos diferencia de otros proyectos del hackathon</a:t>
+            </a:r>
+          </a:p>
+        </p:txBody>
+      </p:sp>
+      <p:sp>
+        <p:nvSpPr>
+          <p:cNvPr id="6" name="TextBox 5"/>
+          <p:cNvSpPr txBox="1"/>
+          <p:nvPr/>
+        </p:nvSpPr>
+        <p:spPr>
+          <a:xfrm>
+            <a:off x="640080" y="1554480"/>
+            <a:ext cx="10972800" cy="548640"/>
+          </a:xfrm>
+          <a:prstGeom prst="rect">
+            <a:avLst/>
+          </a:prstGeom>
+          <a:noFill/>
+        </p:spPr>
+        <p:txBody>
+          <a:bodyPr wrap="square" anchor="t" lIns="0" rIns="0" tIns="0" bIns="0">
+            <a:spAutoFit/>
+          </a:bodyPr>
+          <a:lstStyle/>
+          <a:p>
+            <a:pPr algn="l"/>
+            <a:r>
+              <a:rPr sz="1800" b="0">
+                <a:solidFill>
+                  <a:srgbClr val="4B5A52"/>
+                </a:solidFill>
+                <a:latin typeface="Calibri"/>
+              </a:rPr>
+              <a:t>Foco en acción, no solo en visualización</a:t>
+            </a:r>
+          </a:p>
+        </p:txBody>
+      </p:sp>
+      <p:sp>
+        <p:nvSpPr>
+          <p:cNvPr id="7" name="TextBox 6"/>
+          <p:cNvSpPr txBox="1"/>
+          <p:nvPr/>
+        </p:nvSpPr>
+        <p:spPr>
+          <a:xfrm>
+            <a:off x="457200" y="6446520"/>
+            <a:ext cx="7315200" cy="320040"/>
+          </a:xfrm>
+          <a:prstGeom prst="rect">
+            <a:avLst/>
+          </a:prstGeom>
+          <a:noFill/>
+        </p:spPr>
+        <p:txBody>
+          <a:bodyPr wrap="square" anchor="t" lIns="0" rIns="0" tIns="0" bIns="0">
+            <a:spAutoFit/>
+          </a:bodyPr>
+          <a:lstStyle/>
+          <a:p>
+            <a:pPr algn="l"/>
+            <a:r>
+              <a:rPr sz="1100" b="0">
+                <a:solidFill>
+                  <a:srgbClr val="4B5A52"/>
+                </a:solidFill>
+                <a:latin typeface="Calibri"/>
+              </a:rPr>
+              <a:t>Energy Hunter · Hackathon Demo</a:t>
+            </a:r>
+          </a:p>
+        </p:txBody>
+      </p:sp>
+      <p:sp>
+        <p:nvSpPr>
+          <p:cNvPr id="8" name="TextBox 7"/>
+          <p:cNvSpPr txBox="1"/>
+          <p:nvPr/>
+        </p:nvSpPr>
+        <p:spPr>
+          <a:xfrm>
+            <a:off x="10515600" y="6446520"/>
+            <a:ext cx="1280160" cy="320040"/>
+          </a:xfrm>
+          <a:prstGeom prst="rect">
+            <a:avLst/>
+          </a:prstGeom>
+          <a:noFill/>
+        </p:spPr>
+        <p:txBody>
+          <a:bodyPr wrap="square" anchor="t" lIns="0" rIns="0" tIns="0" bIns="0">
+            <a:spAutoFit/>
+          </a:bodyPr>
+          <a:lstStyle/>
+          <a:p>
+            <a:pPr algn="r"/>
+            <a:r>
+              <a:rPr sz="1100" b="0">
+                <a:solidFill>
+                  <a:srgbClr val="4B5A52"/>
+                </a:solidFill>
+                <a:latin typeface="Calibri"/>
+              </a:rPr>
+              <a:t>11 / 12</a:t>
+            </a:r>
+          </a:p>
+        </p:txBody>
+      </p:sp>
+      <p:sp>
+        <p:nvSpPr>
+          <p:cNvPr id="9" name="TextBox 8"/>
+          <p:cNvSpPr txBox="1"/>
+          <p:nvPr/>
+        </p:nvSpPr>
+        <p:spPr>
+          <a:xfrm>
+            <a:off x="640080" y="2377440"/>
+            <a:ext cx="10972800" cy="3657600"/>
+          </a:xfrm>
+          <a:prstGeom prst="rect">
+            <a:avLst/>
+          </a:prstGeom>
+          <a:noFill/>
+        </p:spPr>
+        <p:txBody>
+          <a:bodyPr wrap="square" lIns="0">
+            <a:spAutoFit/>
+          </a:bodyPr>
+          <a:lstStyle/>
+          <a:p>
+            <a:pPr algn="l">
+              <a:spcAft>
+                <a:spcPts val="800"/>
+              </a:spcAft>
+            </a:pPr>
+            <a:r>
+              <a:rPr sz="1800" b="1">
+                <a:solidFill>
+                  <a:srgbClr val="2E8B57"/>
+                </a:solidFill>
+                <a:latin typeface="Calibri"/>
+              </a:rPr>
+              <a:t>▎ </a:t>
+            </a:r>
+            <a:r>
+              <a:rPr sz="1800">
+                <a:solidFill>
+                  <a:srgbClr val="1F2A24"/>
+                </a:solidFill>
+                <a:latin typeface="Calibri"/>
+              </a:rPr>
+              <a:t>Otros muestran datos: nosotros además accionamos el Modo Eco en segundos.</a:t>
+            </a:r>
+          </a:p>
+          <a:p>
+            <a:pPr algn="l">
+              <a:spcAft>
+                <a:spcPts val="800"/>
+              </a:spcAft>
+            </a:pPr>
+            <a:r>
+              <a:rPr sz="1800" b="1">
+                <a:solidFill>
+                  <a:srgbClr val="2E8B57"/>
+                </a:solidFill>
+                <a:latin typeface="Calibri"/>
+              </a:rPr>
+              <a:t>▎ </a:t>
+            </a:r>
+            <a:r>
+              <a:rPr sz="1800">
+                <a:solidFill>
+                  <a:srgbClr val="1F2A24"/>
+                </a:solidFill>
+                <a:latin typeface="Calibri"/>
+              </a:rPr>
+              <a:t>Granularidad por fase, no por edificio entero (cargas críticas siempre seguras).</a:t>
+            </a:r>
+          </a:p>
+          <a:p>
+            <a:pPr algn="l">
+              <a:spcAft>
+                <a:spcPts val="800"/>
+              </a:spcAft>
+            </a:pPr>
+            <a:r>
+              <a:rPr sz="1800" b="1">
+                <a:solidFill>
+                  <a:srgbClr val="2E8B57"/>
+                </a:solidFill>
+                <a:latin typeface="Calibri"/>
+              </a:rPr>
+              <a:t>▎ </a:t>
+            </a:r>
+            <a:r>
+              <a:rPr sz="1800">
+                <a:solidFill>
+                  <a:srgbClr val="1F2A24"/>
+                </a:solidFill>
+                <a:latin typeface="Calibri"/>
+              </a:rPr>
+              <a:t>Stack 100% open-source y reproducible en local sin cuentas cloud.</a:t>
+            </a:r>
+          </a:p>
+          <a:p>
+            <a:pPr algn="l">
+              <a:spcAft>
+                <a:spcPts val="800"/>
+              </a:spcAft>
+            </a:pPr>
+            <a:r>
+              <a:rPr sz="1800" b="1">
+                <a:solidFill>
+                  <a:srgbClr val="2E8B57"/>
+                </a:solidFill>
+                <a:latin typeface="Calibri"/>
+              </a:rPr>
+              <a:t>▎ </a:t>
+            </a:r>
+            <a:r>
+              <a:rPr sz="1800">
+                <a:solidFill>
+                  <a:srgbClr val="1F2A24"/>
+                </a:solidFill>
+                <a:latin typeface="Calibri"/>
+              </a:rPr>
+              <a:t>Accesibilidad WCAG AA desde el día 1, no como capa cosmética.</a:t>
+            </a:r>
+          </a:p>
+          <a:p>
+            <a:pPr algn="l">
+              <a:spcAft>
+                <a:spcPts val="800"/>
+              </a:spcAft>
+            </a:pPr>
+            <a:r>
+              <a:rPr sz="1800" b="1">
+                <a:solidFill>
+                  <a:srgbClr val="2E8B57"/>
+                </a:solidFill>
+                <a:latin typeface="Calibri"/>
+              </a:rPr>
+              <a:t>▎ </a:t>
+            </a:r>
+            <a:r>
+              <a:rPr sz="1800">
+                <a:solidFill>
+                  <a:srgbClr val="1F2A24"/>
+                </a:solidFill>
+                <a:latin typeface="Calibri"/>
+              </a:rPr>
+              <a:t>TDD con propiedades formales: 10 invariantes verificadas con Hypothesis.</a:t>
+            </a:r>
+          </a:p>
+        </p:txBody>
+      </p:sp>
+    </p:spTree>
+  </p:cSld>
+  <p:clrMapOvr>
+    <a:masterClrMapping/>
+  </p:clrMapOvr>
+</p:sld>
+</file>
+
+<file path=ppt/slides/slide12.xml><?xml version="1.0" encoding="utf-8"?>
+<p:sld xmlns:a="http://schemas.openxmlformats.org/drawingml/2006/main" xmlns:p="http://schemas.openxmlformats.org/presentationml/2006/main" xmlns:r="http://schemas.openxmlformats.org/officeDocument/2006/relationships">
+  <p:cSld>
+    <p:spTree>
+      <p:nvGrpSpPr>
+        <p:cNvPr id="1" name=""/>
+        <p:cNvGrpSpPr/>
+        <p:nvPr/>
+      </p:nvGrpSpPr>
+      <p:grpSpPr/>
+      <p:sp>
+        <p:nvSpPr>
+          <p:cNvPr id="2" name="Rectangle 1"/>
+          <p:cNvSpPr/>
+          <p:nvPr/>
+        </p:nvSpPr>
+        <p:spPr>
+          <a:xfrm>
+            <a:off x="0" y="0"/>
+            <a:ext cx="12191695" cy="6858000"/>
+          </a:xfrm>
+          <a:prstGeom prst="rect">
+            <a:avLst/>
+          </a:prstGeom>
+          <a:solidFill>
             <a:srgbClr val="104F3A"/>
           </a:solidFill>
           <a:ln>
@@ -4210,7 +4944,7 @@
                 </a:solidFill>
                 <a:latin typeface="Calibri"/>
               </a:rPr>
-              <a:t>2 / 10</a:t>
+              <a:t>2 / 12</a:t>
             </a:r>
           </a:p>
         </p:txBody>
@@ -4637,7 +5371,7 @@
                 </a:solidFill>
                 <a:latin typeface="Calibri"/>
               </a:rPr>
-              <a:t>3 / 10</a:t>
+              <a:t>3 / 12</a:t>
             </a:r>
           </a:p>
         </p:txBody>
@@ -5064,7 +5798,7 @@
                 </a:solidFill>
                 <a:latin typeface="Calibri"/>
               </a:rPr>
-              <a:t>4 / 10</a:t>
+              <a:t>4 / 12</a:t>
             </a:r>
           </a:p>
         </p:txBody>
@@ -6292,7 +7026,7 @@
                 </a:solidFill>
                 <a:latin typeface="Calibri"/>
               </a:rPr>
-              <a:t>5 / 10</a:t>
+              <a:t>5 / 12</a:t>
             </a:r>
           </a:p>
         </p:txBody>
@@ -6769,7 +7503,7 @@
                 </a:solidFill>
                 <a:latin typeface="Calibri"/>
               </a:rPr>
-              <a:t>6 / 10</a:t>
+              <a:t>6 / 12</a:t>
             </a:r>
           </a:p>
         </p:txBody>
@@ -6968,7 +7702,7 @@
                 </a:solidFill>
                 <a:latin typeface="Calibri"/>
               </a:rPr>
-              <a:t>IMPACTO</a:t>
+              <a:t>DESPLIEGUE EN PRODUCCIÓN</a:t>
             </a:r>
           </a:p>
         </p:txBody>
@@ -7003,7 +7737,7 @@
                 </a:solidFill>
                 <a:latin typeface="Calibri"/>
               </a:rPr>
-              <a:t>Ahorro medible por categoría de carga</a:t>
+              <a:t>Cómo se escala Energy Hunter en AWS con IoT Core</a:t>
             </a:r>
           </a:p>
         </p:txBody>
@@ -7038,7 +7772,7 @@
                 </a:solidFill>
                 <a:latin typeface="Calibri"/>
               </a:rPr>
-              <a:t>Ejemplo de un edificio piloto: 4 fases activadas en Modo Eco durante 1 hora</a:t>
+              <a:t>Mismo código del MVP, ahora con grado industrial: seguro, elástico y multi-región</a:t>
             </a:r>
           </a:p>
         </p:txBody>
@@ -7108,14 +7842,14 @@
                 </a:solidFill>
                 <a:latin typeface="Calibri"/>
               </a:rPr>
-              <a:t>7 / 10</a:t>
+              <a:t>7 / 12</a:t>
             </a:r>
           </a:p>
         </p:txBody>
       </p:sp>
       <p:pic>
         <p:nvPicPr>
-          <p:cNvPr id="9" name="Picture 8" descr="savings_chart.png"/>
+          <p:cNvPr id="9" name="Picture 8" descr="aws_architecture.png"/>
           <p:cNvPicPr>
             <a:picLocks noChangeAspect="1"/>
           </p:cNvPicPr>
@@ -7129,8 +7863,8 @@
         </p:blipFill>
         <p:spPr>
           <a:xfrm>
-            <a:off x="640080" y="2103120"/>
-            <a:ext cx="7772400" cy="4663440"/>
+            <a:off x="365760" y="2057400"/>
+            <a:ext cx="7680960" cy="3840480"/>
           </a:xfrm>
           <a:prstGeom prst="rect">
             <a:avLst/>
@@ -7145,8 +7879,8 @@
         </p:nvSpPr>
         <p:spPr>
           <a:xfrm>
-            <a:off x="8595360" y="2286000"/>
-            <a:ext cx="3108960" cy="4114800"/>
+            <a:off x="8229600" y="2194560"/>
+            <a:ext cx="3657600" cy="4206240"/>
           </a:xfrm>
           <a:prstGeom prst="rect">
             <a:avLst/>
@@ -7165,7 +7899,7 @@
               </a:spcAft>
             </a:pPr>
             <a:r>
-              <a:rPr sz="1500" b="1">
+              <a:rPr sz="1400" b="1">
                 <a:solidFill>
                   <a:srgbClr val="2E8B57"/>
                 </a:solidFill>
@@ -7174,13 +7908,13 @@
               <a:t>▎ </a:t>
             </a:r>
             <a:r>
-              <a:rPr sz="1500">
+              <a:rPr sz="1400">
                 <a:solidFill>
                   <a:srgbClr val="1F2A24"/>
                 </a:solidFill>
                 <a:latin typeface="Calibri"/>
               </a:rPr>
-              <a:t>−40% por fase activada.</a:t>
+              <a:t>AWS IoT Core: MQTT mutuo TLS, Device Shadow por fase.</a:t>
             </a:r>
           </a:p>
           <a:p>
@@ -7190,7 +7924,7 @@
               </a:spcAft>
             </a:pPr>
             <a:r>
-              <a:rPr sz="1500" b="1">
+              <a:rPr sz="1400" b="1">
                 <a:solidFill>
                   <a:srgbClr val="2E8B57"/>
                 </a:solidFill>
@@ -7199,13 +7933,13 @@
               <a:t>▎ </a:t>
             </a:r>
             <a:r>
-              <a:rPr sz="1500">
+              <a:rPr sz="1400">
                 <a:solidFill>
                   <a:srgbClr val="1F2A24"/>
                 </a:solidFill>
                 <a:latin typeface="Calibri"/>
               </a:rPr>
-              <a:t>Reducción proporcional de €/h.</a:t>
+              <a:t>Rules Engine → Lambda → Timestream para series temporales.</a:t>
             </a:r>
           </a:p>
           <a:p>
@@ -7215,7 +7949,7 @@
               </a:spcAft>
             </a:pPr>
             <a:r>
-              <a:rPr sz="1500" b="1">
+              <a:rPr sz="1400" b="1">
                 <a:solidFill>
                   <a:srgbClr val="2E8B57"/>
                 </a:solidFill>
@@ -7224,13 +7958,13 @@
               <a:t>▎ </a:t>
             </a:r>
             <a:r>
-              <a:rPr sz="1500">
+              <a:rPr sz="1400">
                 <a:solidFill>
                   <a:srgbClr val="1F2A24"/>
                 </a:solidFill>
                 <a:latin typeface="Calibri"/>
               </a:rPr>
-              <a:t>Menos huella de CO₂ inmediata.</a:t>
+              <a:t>S3 + Athena para histórico y auditoría barata.</a:t>
             </a:r>
           </a:p>
           <a:p>
@@ -7240,7 +7974,7 @@
               </a:spcAft>
             </a:pPr>
             <a:r>
-              <a:rPr sz="1500" b="1">
+              <a:rPr sz="1400" b="1">
                 <a:solidFill>
                   <a:srgbClr val="2E8B57"/>
                 </a:solidFill>
@@ -7249,13 +7983,13 @@
               <a:t>▎ </a:t>
             </a:r>
             <a:r>
-              <a:rPr sz="1500">
+              <a:rPr sz="1400">
                 <a:solidFill>
                   <a:srgbClr val="1F2A24"/>
                 </a:solidFill>
                 <a:latin typeface="Calibri"/>
               </a:rPr>
-              <a:t>Sin tocar servidores críticos.</a:t>
+              <a:t>Lambda detecta anomalías y publica al webhook de Modo Eco.</a:t>
             </a:r>
           </a:p>
           <a:p>
@@ -7265,7 +7999,7 @@
               </a:spcAft>
             </a:pPr>
             <a:r>
-              <a:rPr sz="1500" b="1">
+              <a:rPr sz="1400" b="1">
                 <a:solidFill>
                   <a:srgbClr val="2E8B57"/>
                 </a:solidFill>
@@ -7274,13 +8008,38 @@
               <a:t>▎ </a:t>
             </a:r>
             <a:r>
-              <a:rPr sz="1500">
+              <a:rPr sz="1400">
                 <a:solidFill>
                   <a:srgbClr val="1F2A24"/>
                 </a:solidFill>
                 <a:latin typeface="Calibri"/>
               </a:rPr>
-              <a:t>Auditable: cada acción queda registrada.</a:t>
+              <a:t>Streamlit corre en ECS Fargate detrás de CloudFront + Cognito.</a:t>
+            </a:r>
+          </a:p>
+          <a:p>
+            <a:pPr algn="l">
+              <a:spcAft>
+                <a:spcPts val="800"/>
+              </a:spcAft>
+            </a:pPr>
+            <a:r>
+              <a:rPr sz="1400" b="1">
+                <a:solidFill>
+                  <a:srgbClr val="2E8B57"/>
+                </a:solidFill>
+                <a:latin typeface="Calibri"/>
+              </a:rPr>
+              <a:t>▎ </a:t>
+            </a:r>
+            <a:r>
+              <a:rPr sz="1400">
+                <a:solidFill>
+                  <a:srgbClr val="1F2A24"/>
+                </a:solidFill>
+                <a:latin typeface="Calibri"/>
+              </a:rPr>
+              <a:t>Greengrass opcional para autonomía sin red en planta.</a:t>
             </a:r>
           </a:p>
         </p:txBody>
@@ -7420,7 +8179,7 @@
                 </a:solidFill>
                 <a:latin typeface="Calibri"/>
               </a:rPr>
-              <a:t>HACIA DÓNDE VA</a:t>
+              <a:t>COSTE Y RETORNO</a:t>
             </a:r>
           </a:p>
         </p:txBody>
@@ -7455,7 +8214,7 @@
                 </a:solidFill>
                 <a:latin typeface="Calibri"/>
               </a:rPr>
-              <a:t>Roadmap del MVP al producto</a:t>
+              <a:t>Lo que paga el cliente en AWS frente a lo que ahorra</a:t>
             </a:r>
           </a:p>
         </p:txBody>
@@ -7490,7 +8249,7 @@
                 </a:solidFill>
                 <a:latin typeface="Calibri"/>
               </a:rPr>
-              <a:t>Hoy: hackathon. Mañana: piloto real con breakers físicos.</a:t>
+              <a:t>Tres escenarios reales · ROI positivo desde el primer mes</a:t>
             </a:r>
           </a:p>
         </p:txBody>
@@ -7560,14 +8319,14 @@
                 </a:solidFill>
                 <a:latin typeface="Calibri"/>
               </a:rPr>
-              <a:t>8 / 10</a:t>
+              <a:t>8 / 12</a:t>
             </a:r>
           </a:p>
         </p:txBody>
       </p:sp>
       <p:pic>
         <p:nvPicPr>
-          <p:cNvPr id="9" name="Picture 8" descr="roadmap.png"/>
+          <p:cNvPr id="9" name="Picture 8" descr="aws_cost_comparison.png"/>
           <p:cNvPicPr>
             <a:picLocks noChangeAspect="1"/>
           </p:cNvPicPr>
@@ -7581,14 +8340,222 @@
         </p:blipFill>
         <p:spPr>
           <a:xfrm>
-            <a:off x="457200" y="2286000"/>
-            <a:ext cx="11247120" cy="4016829"/>
+            <a:off x="365760" y="2011680"/>
+            <a:ext cx="7680960" cy="4169664"/>
           </a:xfrm>
           <a:prstGeom prst="rect">
             <a:avLst/>
           </a:prstGeom>
         </p:spPr>
       </p:pic>
+      <p:sp>
+        <p:nvSpPr>
+          <p:cNvPr id="10" name="TextBox 9"/>
+          <p:cNvSpPr txBox="1"/>
+          <p:nvPr/>
+        </p:nvSpPr>
+        <p:spPr>
+          <a:xfrm>
+            <a:off x="8229600" y="2103120"/>
+            <a:ext cx="3657600" cy="4297680"/>
+          </a:xfrm>
+          <a:prstGeom prst="rect">
+            <a:avLst/>
+          </a:prstGeom>
+          <a:noFill/>
+        </p:spPr>
+        <p:txBody>
+          <a:bodyPr wrap="square" lIns="0">
+            <a:spAutoFit/>
+          </a:bodyPr>
+          <a:lstStyle/>
+          <a:p>
+            <a:pPr algn="l">
+              <a:spcAft>
+                <a:spcPts val="800"/>
+              </a:spcAft>
+            </a:pPr>
+            <a:r>
+              <a:rPr sz="1400" b="1">
+                <a:solidFill>
+                  <a:srgbClr val="2E8B57"/>
+                </a:solidFill>
+                <a:latin typeface="Calibri"/>
+              </a:rPr>
+              <a:t>▎ </a:t>
+            </a:r>
+            <a:r>
+              <a:rPr sz="1400">
+                <a:solidFill>
+                  <a:srgbClr val="1F2A24"/>
+                </a:solidFill>
+                <a:latin typeface="Calibri"/>
+              </a:rPr>
+              <a:t>Pyme: ~95 €/mes en AWS · ahorro ≈ 720 €/mes.</a:t>
+            </a:r>
+          </a:p>
+          <a:p>
+            <a:pPr algn="l">
+              <a:spcAft>
+                <a:spcPts val="800"/>
+              </a:spcAft>
+            </a:pPr>
+            <a:r>
+              <a:rPr sz="1400" b="1">
+                <a:solidFill>
+                  <a:srgbClr val="2E8B57"/>
+                </a:solidFill>
+                <a:latin typeface="Calibri"/>
+              </a:rPr>
+              <a:t>▎ </a:t>
+            </a:r>
+            <a:r>
+              <a:rPr sz="1400">
+                <a:solidFill>
+                  <a:srgbClr val="1F2A24"/>
+                </a:solidFill>
+                <a:latin typeface="Calibri"/>
+              </a:rPr>
+              <a:t>Mediana: ~380 €/mes en AWS · ahorro ≈ 4.200 €/mes.</a:t>
+            </a:r>
+          </a:p>
+          <a:p>
+            <a:pPr algn="l">
+              <a:spcAft>
+                <a:spcPts val="800"/>
+              </a:spcAft>
+            </a:pPr>
+            <a:r>
+              <a:rPr sz="1400" b="1">
+                <a:solidFill>
+                  <a:srgbClr val="2E8B57"/>
+                </a:solidFill>
+                <a:latin typeface="Calibri"/>
+              </a:rPr>
+              <a:t>▎ </a:t>
+            </a:r>
+            <a:r>
+              <a:rPr sz="1400">
+                <a:solidFill>
+                  <a:srgbClr val="1F2A24"/>
+                </a:solidFill>
+                <a:latin typeface="Calibri"/>
+              </a:rPr>
+              <a:t>Corporativo: ~1.850 €/mes · ahorro ≈ 26.000 €/mes.</a:t>
+            </a:r>
+          </a:p>
+          <a:p>
+            <a:pPr algn="l">
+              <a:spcAft>
+                <a:spcPts val="800"/>
+              </a:spcAft>
+            </a:pPr>
+            <a:r>
+              <a:rPr sz="1400" b="1">
+                <a:solidFill>
+                  <a:srgbClr val="2E8B57"/>
+                </a:solidFill>
+                <a:latin typeface="Calibri"/>
+              </a:rPr>
+              <a:t>▎ </a:t>
+            </a:r>
+            <a:r>
+              <a:rPr sz="1400">
+                <a:solidFill>
+                  <a:srgbClr val="1F2A24"/>
+                </a:solidFill>
+                <a:latin typeface="Calibri"/>
+              </a:rPr>
+              <a:t>Pago por uso: IoT Core, Timestream, Lambda, Fargate.</a:t>
+            </a:r>
+          </a:p>
+          <a:p>
+            <a:pPr algn="l">
+              <a:spcAft>
+                <a:spcPts val="800"/>
+              </a:spcAft>
+            </a:pPr>
+            <a:r>
+              <a:rPr sz="1400" b="1">
+                <a:solidFill>
+                  <a:srgbClr val="2E8B57"/>
+                </a:solidFill>
+                <a:latin typeface="Calibri"/>
+              </a:rPr>
+              <a:t>▎ </a:t>
+            </a:r>
+            <a:r>
+              <a:rPr sz="1400">
+                <a:solidFill>
+                  <a:srgbClr val="1F2A24"/>
+                </a:solidFill>
+                <a:latin typeface="Calibri"/>
+              </a:rPr>
+              <a:t>Sin licencias por dispositivo ni costes ocultos.</a:t>
+            </a:r>
+          </a:p>
+          <a:p>
+            <a:pPr algn="l">
+              <a:spcAft>
+                <a:spcPts val="800"/>
+              </a:spcAft>
+            </a:pPr>
+            <a:r>
+              <a:rPr sz="1400" b="1">
+                <a:solidFill>
+                  <a:srgbClr val="2E8B57"/>
+                </a:solidFill>
+                <a:latin typeface="Calibri"/>
+              </a:rPr>
+              <a:t>▎ </a:t>
+            </a:r>
+            <a:r>
+              <a:rPr sz="1400">
+                <a:solidFill>
+                  <a:srgbClr val="1F2A24"/>
+                </a:solidFill>
+                <a:latin typeface="Calibri"/>
+              </a:rPr>
+              <a:t>ROI &gt; 7× en todos los tramos analizados.</a:t>
+            </a:r>
+          </a:p>
+        </p:txBody>
+      </p:sp>
+      <p:sp>
+        <p:nvSpPr>
+          <p:cNvPr id="11" name="TextBox 10"/>
+          <p:cNvSpPr txBox="1"/>
+          <p:nvPr/>
+        </p:nvSpPr>
+        <p:spPr>
+          <a:xfrm>
+            <a:off x="457200" y="6080760"/>
+            <a:ext cx="11247120" cy="320040"/>
+          </a:xfrm>
+          <a:prstGeom prst="rect">
+            <a:avLst/>
+          </a:prstGeom>
+          <a:noFill/>
+        </p:spPr>
+        <p:txBody>
+          <a:bodyPr wrap="square" anchor="t" lIns="0" rIns="0" tIns="0" bIns="0">
+            <a:spAutoFit/>
+          </a:bodyPr>
+          <a:lstStyle/>
+          <a:p>
+            <a:pPr algn="l"/>
+            <a:r>
+              <a:rPr sz="1000" b="0">
+                <a:solidFill>
+                  <a:srgbClr val="4B5A52"/>
+                </a:solidFill>
+                <a:latin typeface="Calibri"/>
+              </a:rPr>
+              <a:t>Estimaciones orientativas en eu-west-1, basadas en mensajes IoT cada 30 s y ahorro medio del 15% sobre la factura mensual del cliente.</a:t>
+            </a:r>
+          </a:p>
+        </p:txBody>
+      </p:sp>
     </p:spTree>
   </p:cSld>
   <p:clrMapOvr>
@@ -7724,7 +8691,7 @@
                 </a:solidFill>
                 <a:latin typeface="Calibri"/>
               </a:rPr>
-              <a:t>FRENTE A ALTERNATIVAS</a:t>
+              <a:t>IMPACTO</a:t>
             </a:r>
           </a:p>
         </p:txBody>
@@ -7759,7 +8726,7 @@
                 </a:solidFill>
                 <a:latin typeface="Calibri"/>
               </a:rPr>
-              <a:t>Lo que nos diferencia de otros proyectos del hackathon</a:t>
+              <a:t>Ahorro medible por categoría de carga</a:t>
             </a:r>
           </a:p>
         </p:txBody>
@@ -7794,7 +8761,7 @@
                 </a:solidFill>
                 <a:latin typeface="Calibri"/>
               </a:rPr>
-              <a:t>Foco en acción, no solo en visualización</a:t>
+              <a:t>Ejemplo de un edificio piloto: 4 fases activadas en Modo Eco durante 1 hora</a:t>
             </a:r>
           </a:p>
         </p:txBody>
@@ -7864,21 +8831,45 @@
                 </a:solidFill>
                 <a:latin typeface="Calibri"/>
               </a:rPr>
-              <a:t>9 / 10</a:t>
-            </a:r>
-          </a:p>
-        </p:txBody>
-      </p:sp>
-      <p:sp>
-        <p:nvSpPr>
-          <p:cNvPr id="9" name="TextBox 8"/>
+              <a:t>9 / 12</a:t>
+            </a:r>
+          </a:p>
+        </p:txBody>
+      </p:sp>
+      <p:pic>
+        <p:nvPicPr>
+          <p:cNvPr id="9" name="Picture 8" descr="savings_chart.png"/>
+          <p:cNvPicPr>
+            <a:picLocks noChangeAspect="1"/>
+          </p:cNvPicPr>
+          <p:nvPr/>
+        </p:nvPicPr>
+        <p:blipFill>
+          <a:blip r:embed="rId2"/>
+          <a:stretch>
+            <a:fillRect/>
+          </a:stretch>
+        </p:blipFill>
+        <p:spPr>
+          <a:xfrm>
+            <a:off x="640080" y="2103120"/>
+            <a:ext cx="7772400" cy="4663440"/>
+          </a:xfrm>
+          <a:prstGeom prst="rect">
+            <a:avLst/>
+          </a:prstGeom>
+        </p:spPr>
+      </p:pic>
+      <p:sp>
+        <p:nvSpPr>
+          <p:cNvPr id="10" name="TextBox 9"/>
           <p:cNvSpPr txBox="1"/>
           <p:nvPr/>
         </p:nvSpPr>
         <p:spPr>
           <a:xfrm>
-            <a:off x="640080" y="2377440"/>
-            <a:ext cx="10972800" cy="3657600"/>
+            <a:off x="8595360" y="2286000"/>
+            <a:ext cx="3108960" cy="4114800"/>
           </a:xfrm>
           <a:prstGeom prst="rect">
             <a:avLst/>
@@ -7897,7 +8888,7 @@
               </a:spcAft>
             </a:pPr>
             <a:r>
-              <a:rPr sz="1800" b="1">
+              <a:rPr sz="1500" b="1">
                 <a:solidFill>
                   <a:srgbClr val="2E8B57"/>
                 </a:solidFill>
@@ -7906,13 +8897,13 @@
               <a:t>▎ </a:t>
             </a:r>
             <a:r>
-              <a:rPr sz="1800">
+              <a:rPr sz="1500">
                 <a:solidFill>
                   <a:srgbClr val="1F2A24"/>
                 </a:solidFill>
                 <a:latin typeface="Calibri"/>
               </a:rPr>
-              <a:t>Otros muestran datos: nosotros además accionamos el Modo Eco en segundos.</a:t>
+              <a:t>−40% por fase activada.</a:t>
             </a:r>
           </a:p>
           <a:p>
@@ -7922,7 +8913,7 @@
               </a:spcAft>
             </a:pPr>
             <a:r>
-              <a:rPr sz="1800" b="1">
+              <a:rPr sz="1500" b="1">
                 <a:solidFill>
                   <a:srgbClr val="2E8B57"/>
                 </a:solidFill>
@@ -7931,13 +8922,13 @@
               <a:t>▎ </a:t>
             </a:r>
             <a:r>
-              <a:rPr sz="1800">
+              <a:rPr sz="1500">
                 <a:solidFill>
                   <a:srgbClr val="1F2A24"/>
                 </a:solidFill>
                 <a:latin typeface="Calibri"/>
               </a:rPr>
-              <a:t>Granularidad por fase, no por edificio entero (cargas críticas siempre seguras).</a:t>
+              <a:t>Reducción proporcional de €/h.</a:t>
             </a:r>
           </a:p>
           <a:p>
@@ -7947,7 +8938,7 @@
               </a:spcAft>
             </a:pPr>
             <a:r>
-              <a:rPr sz="1800" b="1">
+              <a:rPr sz="1500" b="1">
                 <a:solidFill>
                   <a:srgbClr val="2E8B57"/>
                 </a:solidFill>
@@ -7956,13 +8947,13 @@
               <a:t>▎ </a:t>
             </a:r>
             <a:r>
-              <a:rPr sz="1800">
+              <a:rPr sz="1500">
                 <a:solidFill>
                   <a:srgbClr val="1F2A24"/>
                 </a:solidFill>
                 <a:latin typeface="Calibri"/>
               </a:rPr>
-              <a:t>Stack 100% open-source y reproducible en local sin cuentas cloud.</a:t>
+              <a:t>Menos huella de CO₂ inmediata.</a:t>
             </a:r>
           </a:p>
           <a:p>
@@ -7972,7 +8963,7 @@
               </a:spcAft>
             </a:pPr>
             <a:r>
-              <a:rPr sz="1800" b="1">
+              <a:rPr sz="1500" b="1">
                 <a:solidFill>
                   <a:srgbClr val="2E8B57"/>
                 </a:solidFill>
@@ -7981,13 +8972,13 @@
               <a:t>▎ </a:t>
             </a:r>
             <a:r>
-              <a:rPr sz="1800">
+              <a:rPr sz="1500">
                 <a:solidFill>
                   <a:srgbClr val="1F2A24"/>
                 </a:solidFill>
                 <a:latin typeface="Calibri"/>
               </a:rPr>
-              <a:t>Accesibilidad WCAG AA desde el día 1, no como capa cosmética.</a:t>
+              <a:t>Sin tocar servidores críticos.</a:t>
             </a:r>
           </a:p>
           <a:p>
@@ -7997,7 +8988,7 @@
               </a:spcAft>
             </a:pPr>
             <a:r>
-              <a:rPr sz="1800" b="1">
+              <a:rPr sz="1500" b="1">
                 <a:solidFill>
                   <a:srgbClr val="2E8B57"/>
                 </a:solidFill>
@@ -8006,13 +8997,13 @@
               <a:t>▎ </a:t>
             </a:r>
             <a:r>
-              <a:rPr sz="1800">
+              <a:rPr sz="1500">
                 <a:solidFill>
                   <a:srgbClr val="1F2A24"/>
                 </a:solidFill>
                 <a:latin typeface="Calibri"/>
               </a:rPr>
-              <a:t>TDD con propiedades formales: 10 invariantes verificadas con Hypothesis.</a:t>
+              <a:t>Auditable: cada acción queda registrada.</a:t>
             </a:r>
           </a:p>
         </p:txBody>

--- a/presentations/energy_hunter_pitch.pptx
+++ b/presentations/energy_hunter_pitch.pptx
@@ -17,6 +17,7 @@
     <p:sldId id="265" r:id="rId16"/>
     <p:sldId id="266" r:id="rId17"/>
     <p:sldId id="267" r:id="rId18"/>
+    <p:sldId id="268" r:id="rId19"/>
   </p:sldIdLst>
   <p:sldSz cx="12191695" cy="6858000" type="screen4x3"/>
   <p:notesSz cx="6858000" cy="9144000"/>
@@ -116,6 +117,1266 @@
     </a:lvl9pPr>
   </p:defaultTextStyle>
 </p:presentation>
+</file>
+
+<file path=ppt/notesMasters/notesMaster1.xml><?xml version="1.0" encoding="utf-8"?>
+<p:notesMaster xmlns:a="http://schemas.openxmlformats.org/drawingml/2006/main" xmlns:p="http://schemas.openxmlformats.org/presentationml/2006/main" xmlns:r="http://schemas.openxmlformats.org/officeDocument/2006/relationships">
+  <p:cSld>
+    <p:bg>
+      <p:bgRef idx="1001">
+        <a:schemeClr val="bg1"/>
+      </p:bgRef>
+    </p:bg>
+    <p:spTree>
+      <p:nvGrpSpPr>
+        <p:cNvPr id="1" name=""/>
+        <p:cNvGrpSpPr/>
+        <p:nvPr/>
+      </p:nvGrpSpPr>
+      <p:grpSpPr>
+        <a:xfrm>
+          <a:off x="0" y="0"/>
+          <a:ext cx="0" cy="0"/>
+          <a:chOff x="0" y="0"/>
+          <a:chExt cx="0" cy="0"/>
+        </a:xfrm>
+      </p:grpSpPr>
+      <p:sp>
+        <p:nvSpPr>
+          <p:cNvPr id="2" name="Header Placeholder 1"/>
+          <p:cNvSpPr>
+            <a:spLocks noGrp="1"/>
+          </p:cNvSpPr>
+          <p:nvPr>
+            <p:ph type="hdr" sz="quarter"/>
+          </p:nvPr>
+        </p:nvSpPr>
+        <p:spPr>
+          <a:xfrm>
+            <a:off x="0" y="0"/>
+            <a:ext cx="2971800" cy="457200"/>
+          </a:xfrm>
+          <a:prstGeom prst="rect">
+            <a:avLst/>
+          </a:prstGeom>
+        </p:spPr>
+        <p:txBody>
+          <a:bodyPr vert="horz" lIns="91440" tIns="45720" rIns="91440" bIns="45720" rtlCol="0"/>
+          <a:lstStyle>
+            <a:lvl1pPr algn="l">
+              <a:defRPr sz="1200"/>
+            </a:lvl1pPr>
+          </a:lstStyle>
+          <a:p>
+            <a:endParaRPr lang="en-US"/>
+          </a:p>
+        </p:txBody>
+      </p:sp>
+      <p:sp>
+        <p:nvSpPr>
+          <p:cNvPr id="3" name="Date Placeholder 2"/>
+          <p:cNvSpPr>
+            <a:spLocks noGrp="1"/>
+          </p:cNvSpPr>
+          <p:nvPr>
+            <p:ph type="dt" idx="1"/>
+          </p:nvPr>
+        </p:nvSpPr>
+        <p:spPr>
+          <a:xfrm>
+            <a:off x="3884613" y="0"/>
+            <a:ext cx="2971800" cy="457200"/>
+          </a:xfrm>
+          <a:prstGeom prst="rect">
+            <a:avLst/>
+          </a:prstGeom>
+        </p:spPr>
+        <p:txBody>
+          <a:bodyPr vert="horz" lIns="91440" tIns="45720" rIns="91440" bIns="45720" rtlCol="0"/>
+          <a:lstStyle>
+            <a:lvl1pPr algn="r">
+              <a:defRPr sz="1200"/>
+            </a:lvl1pPr>
+          </a:lstStyle>
+          <a:p>
+            <a:fld id="{0F89C1C7-3DCD-1040-A9CF-14679D8B5DDD}" type="datetimeFigureOut">
+              <a:rPr lang="en-US" smtClean="0"/>
+              <a:t>10/17/16</a:t>
+            </a:fld>
+            <a:endParaRPr lang="en-US"/>
+          </a:p>
+        </p:txBody>
+      </p:sp>
+      <p:sp>
+        <p:nvSpPr>
+          <p:cNvPr id="4" name="Slide Image Placeholder 3"/>
+          <p:cNvSpPr>
+            <a:spLocks noGrp="1" noRot="1" noChangeAspect="1"/>
+          </p:cNvSpPr>
+          <p:nvPr>
+            <p:ph type="sldImg" idx="2"/>
+          </p:nvPr>
+        </p:nvSpPr>
+        <p:spPr>
+          <a:xfrm>
+            <a:off x="1143000" y="685800"/>
+            <a:ext cx="4572000" cy="3429000"/>
+          </a:xfrm>
+          <a:prstGeom prst="rect">
+            <a:avLst/>
+          </a:prstGeom>
+          <a:noFill/>
+          <a:ln w="12700">
+            <a:solidFill>
+              <a:prstClr val="black"/>
+            </a:solidFill>
+          </a:ln>
+        </p:spPr>
+        <p:txBody>
+          <a:bodyPr vert="horz" lIns="91440" tIns="45720" rIns="91440" bIns="45720" rtlCol="0" anchor="ctr"/>
+          <a:lstStyle/>
+          <a:p>
+            <a:endParaRPr lang="en-US"/>
+          </a:p>
+        </p:txBody>
+      </p:sp>
+      <p:sp>
+        <p:nvSpPr>
+          <p:cNvPr id="5" name="Notes Placeholder 4"/>
+          <p:cNvSpPr>
+            <a:spLocks noGrp="1"/>
+          </p:cNvSpPr>
+          <p:nvPr>
+            <p:ph type="body" sz="quarter" idx="3"/>
+          </p:nvPr>
+        </p:nvSpPr>
+        <p:spPr>
+          <a:xfrm>
+            <a:off x="685800" y="4343400"/>
+            <a:ext cx="5486400" cy="4114800"/>
+          </a:xfrm>
+          <a:prstGeom prst="rect">
+            <a:avLst/>
+          </a:prstGeom>
+        </p:spPr>
+        <p:txBody>
+          <a:bodyPr vert="horz" lIns="91440" tIns="45720" rIns="91440" bIns="45720" rtlCol="0"/>
+          <a:lstStyle/>
+          <a:p>
+            <a:pPr lvl="0"/>
+            <a:r>
+              <a:rPr lang="en-US" smtClean="0"/>
+              <a:t>Click to edit Master text styles</a:t>
+            </a:r>
+          </a:p>
+          <a:p>
+            <a:pPr lvl="1"/>
+            <a:r>
+              <a:rPr lang="en-US" smtClean="0"/>
+              <a:t>Second level</a:t>
+            </a:r>
+          </a:p>
+          <a:p>
+            <a:pPr lvl="2"/>
+            <a:r>
+              <a:rPr lang="en-US" smtClean="0"/>
+              <a:t>Third level</a:t>
+            </a:r>
+          </a:p>
+          <a:p>
+            <a:pPr lvl="3"/>
+            <a:r>
+              <a:rPr lang="en-US" smtClean="0"/>
+              <a:t>Fourth level</a:t>
+            </a:r>
+          </a:p>
+          <a:p>
+            <a:pPr lvl="4"/>
+            <a:r>
+              <a:rPr lang="en-US" smtClean="0"/>
+              <a:t>Fifth level</a:t>
+            </a:r>
+            <a:endParaRPr lang="en-US"/>
+          </a:p>
+        </p:txBody>
+      </p:sp>
+      <p:sp>
+        <p:nvSpPr>
+          <p:cNvPr id="6" name="Footer Placeholder 5"/>
+          <p:cNvSpPr>
+            <a:spLocks noGrp="1"/>
+          </p:cNvSpPr>
+          <p:nvPr>
+            <p:ph type="ftr" sz="quarter" idx="4"/>
+          </p:nvPr>
+        </p:nvSpPr>
+        <p:spPr>
+          <a:xfrm>
+            <a:off x="0" y="8685213"/>
+            <a:ext cx="2971800" cy="457200"/>
+          </a:xfrm>
+          <a:prstGeom prst="rect">
+            <a:avLst/>
+          </a:prstGeom>
+        </p:spPr>
+        <p:txBody>
+          <a:bodyPr vert="horz" lIns="91440" tIns="45720" rIns="91440" bIns="45720" rtlCol="0" anchor="b"/>
+          <a:lstStyle>
+            <a:lvl1pPr algn="l">
+              <a:defRPr sz="1200"/>
+            </a:lvl1pPr>
+          </a:lstStyle>
+          <a:p>
+            <a:endParaRPr lang="en-US"/>
+          </a:p>
+        </p:txBody>
+      </p:sp>
+      <p:sp>
+        <p:nvSpPr>
+          <p:cNvPr id="7" name="Slide Number Placeholder 6"/>
+          <p:cNvSpPr>
+            <a:spLocks noGrp="1"/>
+          </p:cNvSpPr>
+          <p:nvPr>
+            <p:ph type="sldNum" sz="quarter" idx="5"/>
+          </p:nvPr>
+        </p:nvSpPr>
+        <p:spPr>
+          <a:xfrm>
+            <a:off x="3884613" y="8685213"/>
+            <a:ext cx="2971800" cy="457200"/>
+          </a:xfrm>
+          <a:prstGeom prst="rect">
+            <a:avLst/>
+          </a:prstGeom>
+        </p:spPr>
+        <p:txBody>
+          <a:bodyPr vert="horz" lIns="91440" tIns="45720" rIns="91440" bIns="45720" rtlCol="0" anchor="b"/>
+          <a:lstStyle>
+            <a:lvl1pPr algn="r">
+              <a:defRPr sz="1200"/>
+            </a:lvl1pPr>
+          </a:lstStyle>
+          <a:p>
+            <a:fld id="{BB5E49A5-4136-284D-997B-48E1D791AD67}" type="slidenum">
+              <a:rPr lang="en-US" smtClean="0"/>
+              <a:t>‹#›</a:t>
+            </a:fld>
+            <a:endParaRPr lang="en-US"/>
+          </a:p>
+        </p:txBody>
+      </p:sp>
+    </p:spTree>
+    <p:extLst>
+      <p:ext uri="{BB962C8B-B14F-4D97-AF65-F5344CB8AC3E}">
+        <p14:creationId xmlns:p14="http://schemas.microsoft.com/office/powerpoint/2010/main" val="2623252185"/>
+      </p:ext>
+    </p:extLst>
+  </p:cSld>
+  <p:clrMap bg1="lt1" tx1="dk1" bg2="lt2" tx2="dk2" accent1="accent1" accent2="accent2" accent3="accent3" accent4="accent4" accent5="accent5" accent6="accent6" hlink="hlink" folHlink="folHlink"/>
+  <p:notesStyle>
+    <a:lvl1pPr marL="0" algn="l" defTabSz="457200" rtl="0" eaLnBrk="1" latinLnBrk="0" hangingPunct="1">
+      <a:defRPr sz="1200" kern="1200">
+        <a:solidFill>
+          <a:schemeClr val="tx1"/>
+        </a:solidFill>
+        <a:latin typeface="+mn-lt"/>
+        <a:ea typeface="+mn-ea"/>
+        <a:cs typeface="+mn-cs"/>
+      </a:defRPr>
+    </a:lvl1pPr>
+    <a:lvl2pPr marL="457200" algn="l" defTabSz="457200" rtl="0" eaLnBrk="1" latinLnBrk="0" hangingPunct="1">
+      <a:defRPr sz="1200" kern="1200">
+        <a:solidFill>
+          <a:schemeClr val="tx1"/>
+        </a:solidFill>
+        <a:latin typeface="+mn-lt"/>
+        <a:ea typeface="+mn-ea"/>
+        <a:cs typeface="+mn-cs"/>
+      </a:defRPr>
+    </a:lvl2pPr>
+    <a:lvl3pPr marL="914400" algn="l" defTabSz="457200" rtl="0" eaLnBrk="1" latinLnBrk="0" hangingPunct="1">
+      <a:defRPr sz="1200" kern="1200">
+        <a:solidFill>
+          <a:schemeClr val="tx1"/>
+        </a:solidFill>
+        <a:latin typeface="+mn-lt"/>
+        <a:ea typeface="+mn-ea"/>
+        <a:cs typeface="+mn-cs"/>
+      </a:defRPr>
+    </a:lvl3pPr>
+    <a:lvl4pPr marL="1371600" algn="l" defTabSz="457200" rtl="0" eaLnBrk="1" latinLnBrk="0" hangingPunct="1">
+      <a:defRPr sz="1200" kern="1200">
+        <a:solidFill>
+          <a:schemeClr val="tx1"/>
+        </a:solidFill>
+        <a:latin typeface="+mn-lt"/>
+        <a:ea typeface="+mn-ea"/>
+        <a:cs typeface="+mn-cs"/>
+      </a:defRPr>
+    </a:lvl4pPr>
+    <a:lvl5pPr marL="1828800" algn="l" defTabSz="457200" rtl="0" eaLnBrk="1" latinLnBrk="0" hangingPunct="1">
+      <a:defRPr sz="1200" kern="1200">
+        <a:solidFill>
+          <a:schemeClr val="tx1"/>
+        </a:solidFill>
+        <a:latin typeface="+mn-lt"/>
+        <a:ea typeface="+mn-ea"/>
+        <a:cs typeface="+mn-cs"/>
+      </a:defRPr>
+    </a:lvl5pPr>
+    <a:lvl6pPr marL="2286000" algn="l" defTabSz="457200" rtl="0" eaLnBrk="1" latinLnBrk="0" hangingPunct="1">
+      <a:defRPr sz="1200" kern="1200">
+        <a:solidFill>
+          <a:schemeClr val="tx1"/>
+        </a:solidFill>
+        <a:latin typeface="+mn-lt"/>
+        <a:ea typeface="+mn-ea"/>
+        <a:cs typeface="+mn-cs"/>
+      </a:defRPr>
+    </a:lvl6pPr>
+    <a:lvl7pPr marL="2743200" algn="l" defTabSz="457200" rtl="0" eaLnBrk="1" latinLnBrk="0" hangingPunct="1">
+      <a:defRPr sz="1200" kern="1200">
+        <a:solidFill>
+          <a:schemeClr val="tx1"/>
+        </a:solidFill>
+        <a:latin typeface="+mn-lt"/>
+        <a:ea typeface="+mn-ea"/>
+        <a:cs typeface="+mn-cs"/>
+      </a:defRPr>
+    </a:lvl7pPr>
+    <a:lvl8pPr marL="3200400" algn="l" defTabSz="457200" rtl="0" eaLnBrk="1" latinLnBrk="0" hangingPunct="1">
+      <a:defRPr sz="1200" kern="1200">
+        <a:solidFill>
+          <a:schemeClr val="tx1"/>
+        </a:solidFill>
+        <a:latin typeface="+mn-lt"/>
+        <a:ea typeface="+mn-ea"/>
+        <a:cs typeface="+mn-cs"/>
+      </a:defRPr>
+    </a:lvl8pPr>
+    <a:lvl9pPr marL="3657600" algn="l" defTabSz="457200" rtl="0" eaLnBrk="1" latinLnBrk="0" hangingPunct="1">
+      <a:defRPr sz="1200" kern="1200">
+        <a:solidFill>
+          <a:schemeClr val="tx1"/>
+        </a:solidFill>
+        <a:latin typeface="+mn-lt"/>
+        <a:ea typeface="+mn-ea"/>
+        <a:cs typeface="+mn-cs"/>
+      </a:defRPr>
+    </a:lvl9pPr>
+  </p:notesStyle>
+</p:notesMaster>
+</file>
+
+<file path=ppt/notesSlides/notesSlide1.xml><?xml version="1.0" encoding="utf-8"?>
+<p:notes xmlns:a="http://schemas.openxmlformats.org/drawingml/2006/main" xmlns:p="http://schemas.openxmlformats.org/presentationml/2006/main" xmlns:r="http://schemas.openxmlformats.org/officeDocument/2006/relationships">
+  <p:cSld>
+    <p:spTree>
+      <p:nvGrpSpPr>
+        <p:cNvPr id="1" name=""/>
+        <p:cNvGrpSpPr/>
+        <p:nvPr/>
+      </p:nvGrpSpPr>
+      <p:grpSpPr>
+        <a:xfrm>
+          <a:off x="0" y="0"/>
+          <a:ext cx="0" cy="0"/>
+          <a:chOff x="0" y="0"/>
+          <a:chExt cx="0" cy="0"/>
+        </a:xfrm>
+      </p:grpSpPr>
+      <p:sp>
+        <p:nvSpPr>
+          <p:cNvPr id="2" name="Slide Image Placeholder 1"/>
+          <p:cNvSpPr>
+            <a:spLocks noGrp="1"/>
+          </p:cNvSpPr>
+          <p:nvPr>
+            <p:ph type="sldImg" idx="2"/>
+          </p:nvPr>
+        </p:nvSpPr>
+        <p:spPr/>
+      </p:sp>
+      <p:sp>
+        <p:nvSpPr>
+          <p:cNvPr id="3" name="Notes Placeholder 2"/>
+          <p:cNvSpPr>
+            <a:spLocks noGrp="1"/>
+          </p:cNvSpPr>
+          <p:nvPr>
+            <p:ph type="body" idx="3" sz="quarter"/>
+          </p:nvPr>
+        </p:nvSpPr>
+        <p:spPr/>
+        <p:txBody>
+          <a:bodyPr/>
+          <a:lstStyle/>
+          <a:p>
+            <a:r>
+              <a:t>Hola, somos el equipo de Energy Hunter. En los próximos cinco minutos vais a ver una herramienta B2B que ayuda a edificios y empresas a consumir menos energía y emitir menos CO2, con un solo clic. Menos consumo, menos emisiones, más control.</a:t>
+            </a:r>
+          </a:p>
+        </p:txBody>
+      </p:sp>
+      <p:sp>
+        <p:nvSpPr>
+          <p:cNvPr id="4" name="Slide Number Placeholder 3"/>
+          <p:cNvSpPr>
+            <a:spLocks noGrp="1"/>
+          </p:cNvSpPr>
+          <p:nvPr>
+            <p:ph type="sldNum" idx="5" sz="quarter"/>
+          </p:nvPr>
+        </p:nvSpPr>
+        <p:spPr/>
+      </p:sp>
+    </p:spTree>
+  </p:cSld>
+  <p:clrMapOvr>
+    <a:masterClrMapping/>
+  </p:clrMapOvr>
+</p:notes>
+</file>
+
+<file path=ppt/notesSlides/notesSlide10.xml><?xml version="1.0" encoding="utf-8"?>
+<p:notes xmlns:a="http://schemas.openxmlformats.org/drawingml/2006/main" xmlns:p="http://schemas.openxmlformats.org/presentationml/2006/main" xmlns:r="http://schemas.openxmlformats.org/officeDocument/2006/relationships">
+  <p:cSld>
+    <p:spTree>
+      <p:nvGrpSpPr>
+        <p:cNvPr id="1" name=""/>
+        <p:cNvGrpSpPr/>
+        <p:nvPr/>
+      </p:nvGrpSpPr>
+      <p:grpSpPr>
+        <a:xfrm>
+          <a:off x="0" y="0"/>
+          <a:ext cx="0" cy="0"/>
+          <a:chOff x="0" y="0"/>
+          <a:chExt cx="0" cy="0"/>
+        </a:xfrm>
+      </p:grpSpPr>
+      <p:sp>
+        <p:nvSpPr>
+          <p:cNvPr id="2" name="Slide Image Placeholder 1"/>
+          <p:cNvSpPr>
+            <a:spLocks noGrp="1"/>
+          </p:cNvSpPr>
+          <p:nvPr>
+            <p:ph type="sldImg" idx="2"/>
+          </p:nvPr>
+        </p:nvSpPr>
+        <p:spPr/>
+      </p:sp>
+      <p:sp>
+        <p:nvSpPr>
+          <p:cNvPr id="3" name="Notes Placeholder 2"/>
+          <p:cNvSpPr>
+            <a:spLocks noGrp="1"/>
+          </p:cNvSpPr>
+          <p:nvPr>
+            <p:ph type="body" idx="3" sz="quarter"/>
+          </p:nvPr>
+        </p:nvSpPr>
+        <p:spPr/>
+        <p:txBody>
+          <a:bodyPr/>
+          <a:lstStyle/>
+          <a:p>
+            <a:r>
+              <a:t>El impacto es medible y auditable. Cada fase que entra en Modo Eco baja su consumo un cuarenta por ciento, lo que se traduce en menos kilovatios, menos euros y menos CO2 emitido. Y todo queda registrado, así que el cliente puede demostrar el ahorro a su comité o a su auditor de sostenibilidad.</a:t>
+            </a:r>
+          </a:p>
+        </p:txBody>
+      </p:sp>
+      <p:sp>
+        <p:nvSpPr>
+          <p:cNvPr id="4" name="Slide Number Placeholder 3"/>
+          <p:cNvSpPr>
+            <a:spLocks noGrp="1"/>
+          </p:cNvSpPr>
+          <p:nvPr>
+            <p:ph type="sldNum" idx="5" sz="quarter"/>
+          </p:nvPr>
+        </p:nvSpPr>
+        <p:spPr/>
+      </p:sp>
+    </p:spTree>
+  </p:cSld>
+  <p:clrMapOvr>
+    <a:masterClrMapping/>
+  </p:clrMapOvr>
+</p:notes>
+</file>
+
+<file path=ppt/notesSlides/notesSlide11.xml><?xml version="1.0" encoding="utf-8"?>
+<p:notes xmlns:a="http://schemas.openxmlformats.org/drawingml/2006/main" xmlns:p="http://schemas.openxmlformats.org/presentationml/2006/main" xmlns:r="http://schemas.openxmlformats.org/officeDocument/2006/relationships">
+  <p:cSld>
+    <p:spTree>
+      <p:nvGrpSpPr>
+        <p:cNvPr id="1" name=""/>
+        <p:cNvGrpSpPr/>
+        <p:nvPr/>
+      </p:nvGrpSpPr>
+      <p:grpSpPr>
+        <a:xfrm>
+          <a:off x="0" y="0"/>
+          <a:ext cx="0" cy="0"/>
+          <a:chOff x="0" y="0"/>
+          <a:chExt cx="0" cy="0"/>
+        </a:xfrm>
+      </p:grpSpPr>
+      <p:sp>
+        <p:nvSpPr>
+          <p:cNvPr id="2" name="Slide Image Placeholder 1"/>
+          <p:cNvSpPr>
+            <a:spLocks noGrp="1"/>
+          </p:cNvSpPr>
+          <p:nvPr>
+            <p:ph type="sldImg" idx="2"/>
+          </p:nvPr>
+        </p:nvSpPr>
+        <p:spPr/>
+      </p:sp>
+      <p:sp>
+        <p:nvSpPr>
+          <p:cNvPr id="3" name="Notes Placeholder 2"/>
+          <p:cNvSpPr>
+            <a:spLocks noGrp="1"/>
+          </p:cNvSpPr>
+          <p:nvPr>
+            <p:ph type="body" idx="3" sz="quarter"/>
+          </p:nvPr>
+        </p:nvSpPr>
+        <p:spPr/>
+        <p:txBody>
+          <a:bodyPr/>
+          <a:lstStyle/>
+          <a:p>
+            <a:r>
+              <a:t>El roadmap es claro. Hoy entregamos el MVP del hackathon. El siguiente paso es un piloto con tres edificios reales. Después integramos breakers físicos vía IoT Core, añadimos multi-tenant y alertas con IA, y lo llevamos al mercado europeo.</a:t>
+            </a:r>
+          </a:p>
+        </p:txBody>
+      </p:sp>
+      <p:sp>
+        <p:nvSpPr>
+          <p:cNvPr id="4" name="Slide Number Placeholder 3"/>
+          <p:cNvSpPr>
+            <a:spLocks noGrp="1"/>
+          </p:cNvSpPr>
+          <p:nvPr>
+            <p:ph type="sldNum" idx="5" sz="quarter"/>
+          </p:nvPr>
+        </p:nvSpPr>
+        <p:spPr/>
+      </p:sp>
+    </p:spTree>
+  </p:cSld>
+  <p:clrMapOvr>
+    <a:masterClrMapping/>
+  </p:clrMapOvr>
+</p:notes>
+</file>
+
+<file path=ppt/notesSlides/notesSlide12.xml><?xml version="1.0" encoding="utf-8"?>
+<p:notes xmlns:a="http://schemas.openxmlformats.org/drawingml/2006/main" xmlns:p="http://schemas.openxmlformats.org/presentationml/2006/main" xmlns:r="http://schemas.openxmlformats.org/officeDocument/2006/relationships">
+  <p:cSld>
+    <p:spTree>
+      <p:nvGrpSpPr>
+        <p:cNvPr id="1" name=""/>
+        <p:cNvGrpSpPr/>
+        <p:nvPr/>
+      </p:nvGrpSpPr>
+      <p:grpSpPr>
+        <a:xfrm>
+          <a:off x="0" y="0"/>
+          <a:ext cx="0" cy="0"/>
+          <a:chOff x="0" y="0"/>
+          <a:chExt cx="0" cy="0"/>
+        </a:xfrm>
+      </p:grpSpPr>
+      <p:sp>
+        <p:nvSpPr>
+          <p:cNvPr id="2" name="Slide Image Placeholder 1"/>
+          <p:cNvSpPr>
+            <a:spLocks noGrp="1"/>
+          </p:cNvSpPr>
+          <p:nvPr>
+            <p:ph type="sldImg" idx="2"/>
+          </p:nvPr>
+        </p:nvSpPr>
+        <p:spPr/>
+      </p:sp>
+      <p:sp>
+        <p:nvSpPr>
+          <p:cNvPr id="3" name="Notes Placeholder 2"/>
+          <p:cNvSpPr>
+            <a:spLocks noGrp="1"/>
+          </p:cNvSpPr>
+          <p:nvPr>
+            <p:ph type="body" idx="3" sz="quarter"/>
+          </p:nvPr>
+        </p:nvSpPr>
+        <p:spPr/>
+        <p:txBody>
+          <a:bodyPr/>
+          <a:lstStyle/>
+          <a:p>
+            <a:r>
+              <a:t>Frente a otros proyectos del hackathon, no nos quedamos en la visualización: actuamos. Granularidad por fase, stack abierto, accesibilidad desde el día uno y verificación formal con propiedades. Eso convierte una demo bonita en algo que un comprador B2B puede llevar a producción.</a:t>
+            </a:r>
+          </a:p>
+        </p:txBody>
+      </p:sp>
+      <p:sp>
+        <p:nvSpPr>
+          <p:cNvPr id="4" name="Slide Number Placeholder 3"/>
+          <p:cNvSpPr>
+            <a:spLocks noGrp="1"/>
+          </p:cNvSpPr>
+          <p:nvPr>
+            <p:ph type="sldNum" idx="5" sz="quarter"/>
+          </p:nvPr>
+        </p:nvSpPr>
+        <p:spPr/>
+      </p:sp>
+    </p:spTree>
+  </p:cSld>
+  <p:clrMapOvr>
+    <a:masterClrMapping/>
+  </p:clrMapOvr>
+</p:notes>
+</file>
+
+<file path=ppt/notesSlides/notesSlide13.xml><?xml version="1.0" encoding="utf-8"?>
+<p:notes xmlns:a="http://schemas.openxmlformats.org/drawingml/2006/main" xmlns:p="http://schemas.openxmlformats.org/presentationml/2006/main" xmlns:r="http://schemas.openxmlformats.org/officeDocument/2006/relationships">
+  <p:cSld>
+    <p:spTree>
+      <p:nvGrpSpPr>
+        <p:cNvPr id="1" name=""/>
+        <p:cNvGrpSpPr/>
+        <p:nvPr/>
+      </p:nvGrpSpPr>
+      <p:grpSpPr>
+        <a:xfrm>
+          <a:off x="0" y="0"/>
+          <a:ext cx="0" cy="0"/>
+          <a:chOff x="0" y="0"/>
+          <a:chExt cx="0" cy="0"/>
+        </a:xfrm>
+      </p:grpSpPr>
+      <p:sp>
+        <p:nvSpPr>
+          <p:cNvPr id="2" name="Slide Image Placeholder 1"/>
+          <p:cNvSpPr>
+            <a:spLocks noGrp="1"/>
+          </p:cNvSpPr>
+          <p:nvPr>
+            <p:ph type="sldImg" idx="2"/>
+          </p:nvPr>
+        </p:nvSpPr>
+        <p:spPr/>
+      </p:sp>
+      <p:sp>
+        <p:nvSpPr>
+          <p:cNvPr id="3" name="Notes Placeholder 2"/>
+          <p:cNvSpPr>
+            <a:spLocks noGrp="1"/>
+          </p:cNvSpPr>
+          <p:nvPr>
+            <p:ph type="body" idx="3" sz="quarter"/>
+          </p:nvPr>
+        </p:nvSpPr>
+        <p:spPr/>
+        <p:txBody>
+          <a:bodyPr/>
+          <a:lstStyle/>
+          <a:p>
+            <a:r>
+              <a:t>Energía bajo control, naturaleza protegida. Energy Hunter convierte cada edificio en un actor activo del ahorro. Estamos abiertos a preguntas y tenemos demo en vivo lista. Gracias.</a:t>
+            </a:r>
+          </a:p>
+        </p:txBody>
+      </p:sp>
+      <p:sp>
+        <p:nvSpPr>
+          <p:cNvPr id="4" name="Slide Number Placeholder 3"/>
+          <p:cNvSpPr>
+            <a:spLocks noGrp="1"/>
+          </p:cNvSpPr>
+          <p:nvPr>
+            <p:ph type="sldNum" idx="5" sz="quarter"/>
+          </p:nvPr>
+        </p:nvSpPr>
+        <p:spPr/>
+      </p:sp>
+    </p:spTree>
+  </p:cSld>
+  <p:clrMapOvr>
+    <a:masterClrMapping/>
+  </p:clrMapOvr>
+</p:notes>
+</file>
+
+<file path=ppt/notesSlides/notesSlide2.xml><?xml version="1.0" encoding="utf-8"?>
+<p:notes xmlns:a="http://schemas.openxmlformats.org/drawingml/2006/main" xmlns:p="http://schemas.openxmlformats.org/presentationml/2006/main" xmlns:r="http://schemas.openxmlformats.org/officeDocument/2006/relationships">
+  <p:cSld>
+    <p:spTree>
+      <p:nvGrpSpPr>
+        <p:cNvPr id="1" name=""/>
+        <p:cNvGrpSpPr/>
+        <p:nvPr/>
+      </p:nvGrpSpPr>
+      <p:grpSpPr>
+        <a:xfrm>
+          <a:off x="0" y="0"/>
+          <a:ext cx="0" cy="0"/>
+          <a:chOff x="0" y="0"/>
+          <a:chExt cx="0" cy="0"/>
+        </a:xfrm>
+      </p:grpSpPr>
+      <p:sp>
+        <p:nvSpPr>
+          <p:cNvPr id="2" name="Slide Image Placeholder 1"/>
+          <p:cNvSpPr>
+            <a:spLocks noGrp="1"/>
+          </p:cNvSpPr>
+          <p:nvPr>
+            <p:ph type="sldImg" idx="2"/>
+          </p:nvPr>
+        </p:nvSpPr>
+        <p:spPr/>
+      </p:sp>
+      <p:sp>
+        <p:nvSpPr>
+          <p:cNvPr id="3" name="Notes Placeholder 2"/>
+          <p:cNvSpPr>
+            <a:spLocks noGrp="1"/>
+          </p:cNvSpPr>
+          <p:nvPr>
+            <p:ph type="body" idx="3" sz="quarter"/>
+          </p:nvPr>
+        </p:nvSpPr>
+        <p:spPr/>
+        <p:txBody>
+          <a:bodyPr/>
+          <a:lstStyle/>
+          <a:p>
+            <a:r>
+              <a:t>Los edificios son responsables de hasta el 40 por ciento del consumo eléctrico mundial. El gestor recibe la factura a fin de mes pero no sabe qué fase ni qué equipo se le ha disparado. Las anomalías pasan días sin detectarse, y apagar cargas no críticas implica llamadas y coordinación. Hay un agujero entre lo que se mide y lo que se puede accionar.</a:t>
+            </a:r>
+          </a:p>
+        </p:txBody>
+      </p:sp>
+      <p:sp>
+        <p:nvSpPr>
+          <p:cNvPr id="4" name="Slide Number Placeholder 3"/>
+          <p:cNvSpPr>
+            <a:spLocks noGrp="1"/>
+          </p:cNvSpPr>
+          <p:nvPr>
+            <p:ph type="sldNum" idx="5" sz="quarter"/>
+          </p:nvPr>
+        </p:nvSpPr>
+        <p:spPr/>
+      </p:sp>
+    </p:spTree>
+  </p:cSld>
+  <p:clrMapOvr>
+    <a:masterClrMapping/>
+  </p:clrMapOvr>
+</p:notes>
+</file>
+
+<file path=ppt/notesSlides/notesSlide3.xml><?xml version="1.0" encoding="utf-8"?>
+<p:notes xmlns:a="http://schemas.openxmlformats.org/drawingml/2006/main" xmlns:p="http://schemas.openxmlformats.org/presentationml/2006/main" xmlns:r="http://schemas.openxmlformats.org/officeDocument/2006/relationships">
+  <p:cSld>
+    <p:spTree>
+      <p:nvGrpSpPr>
+        <p:cNvPr id="1" name=""/>
+        <p:cNvGrpSpPr/>
+        <p:nvPr/>
+      </p:nvGrpSpPr>
+      <p:grpSpPr>
+        <a:xfrm>
+          <a:off x="0" y="0"/>
+          <a:ext cx="0" cy="0"/>
+          <a:chOff x="0" y="0"/>
+          <a:chExt cx="0" cy="0"/>
+        </a:xfrm>
+      </p:grpSpPr>
+      <p:sp>
+        <p:nvSpPr>
+          <p:cNvPr id="2" name="Slide Image Placeholder 1"/>
+          <p:cNvSpPr>
+            <a:spLocks noGrp="1"/>
+          </p:cNvSpPr>
+          <p:nvPr>
+            <p:ph type="sldImg" idx="2"/>
+          </p:nvPr>
+        </p:nvSpPr>
+        <p:spPr/>
+      </p:sp>
+      <p:sp>
+        <p:nvSpPr>
+          <p:cNvPr id="3" name="Notes Placeholder 2"/>
+          <p:cNvSpPr>
+            <a:spLocks noGrp="1"/>
+          </p:cNvSpPr>
+          <p:nvPr>
+            <p:ph type="body" idx="3" sz="quarter"/>
+          </p:nvPr>
+        </p:nvSpPr>
+        <p:spPr/>
+        <p:txBody>
+          <a:bodyPr/>
+          <a:lstStyle/>
+          <a:p>
+            <a:r>
+              <a:t>Energy Hunter cierra ese hueco. Es un panel hecho en Streamlit que recibe telemetría cada 30 segundos por fase, muestra los edificios en mapa, calcula el coste con el precio del mercado SIOS y marca cualquier consumo anómalo. Ve, alerta, y en la siguiente diapositiva veréis cómo actúa.</a:t>
+            </a:r>
+          </a:p>
+        </p:txBody>
+      </p:sp>
+      <p:sp>
+        <p:nvSpPr>
+          <p:cNvPr id="4" name="Slide Number Placeholder 3"/>
+          <p:cNvSpPr>
+            <a:spLocks noGrp="1"/>
+          </p:cNvSpPr>
+          <p:nvPr>
+            <p:ph type="sldNum" idx="5" sz="quarter"/>
+          </p:nvPr>
+        </p:nvSpPr>
+        <p:spPr/>
+      </p:sp>
+    </p:spTree>
+  </p:cSld>
+  <p:clrMapOvr>
+    <a:masterClrMapping/>
+  </p:clrMapOvr>
+</p:notes>
+</file>
+
+<file path=ppt/notesSlides/notesSlide4.xml><?xml version="1.0" encoding="utf-8"?>
+<p:notes xmlns:a="http://schemas.openxmlformats.org/drawingml/2006/main" xmlns:p="http://schemas.openxmlformats.org/presentationml/2006/main" xmlns:r="http://schemas.openxmlformats.org/officeDocument/2006/relationships">
+  <p:cSld>
+    <p:spTree>
+      <p:nvGrpSpPr>
+        <p:cNvPr id="1" name=""/>
+        <p:cNvGrpSpPr/>
+        <p:nvPr/>
+      </p:nvGrpSpPr>
+      <p:grpSpPr>
+        <a:xfrm>
+          <a:off x="0" y="0"/>
+          <a:ext cx="0" cy="0"/>
+          <a:chOff x="0" y="0"/>
+          <a:chExt cx="0" cy="0"/>
+        </a:xfrm>
+      </p:grpSpPr>
+      <p:sp>
+        <p:nvSpPr>
+          <p:cNvPr id="2" name="Slide Image Placeholder 1"/>
+          <p:cNvSpPr>
+            <a:spLocks noGrp="1"/>
+          </p:cNvSpPr>
+          <p:nvPr>
+            <p:ph type="sldImg" idx="2"/>
+          </p:nvPr>
+        </p:nvSpPr>
+        <p:spPr/>
+      </p:sp>
+      <p:sp>
+        <p:nvSpPr>
+          <p:cNvPr id="3" name="Notes Placeholder 2"/>
+          <p:cNvSpPr>
+            <a:spLocks noGrp="1"/>
+          </p:cNvSpPr>
+          <p:nvPr>
+            <p:ph type="body" idx="3" sz="quarter"/>
+          </p:nvPr>
+        </p:nvSpPr>
+        <p:spPr/>
+        <p:txBody>
+          <a:bodyPr/>
+          <a:lstStyle/>
+          <a:p>
+            <a:r>
+              <a:t>Estas son las seis ventajas que diferencian al producto: ahorro inmediato del 40 por ciento por fase, detección automática de anomalías de domingo, control granular sin tocar cargas críticas, telemetría cada 30 segundos con back-off, accesibilidad WCAG 2.1 AA y un stack abierto que cualquiera puede levantar en local en dos comandos.</a:t>
+            </a:r>
+          </a:p>
+        </p:txBody>
+      </p:sp>
+      <p:sp>
+        <p:nvSpPr>
+          <p:cNvPr id="4" name="Slide Number Placeholder 3"/>
+          <p:cNvSpPr>
+            <a:spLocks noGrp="1"/>
+          </p:cNvSpPr>
+          <p:nvPr>
+            <p:ph type="sldNum" idx="5" sz="quarter"/>
+          </p:nvPr>
+        </p:nvSpPr>
+        <p:spPr/>
+      </p:sp>
+    </p:spTree>
+  </p:cSld>
+  <p:clrMapOvr>
+    <a:masterClrMapping/>
+  </p:clrMapOvr>
+</p:notes>
+</file>
+
+<file path=ppt/notesSlides/notesSlide5.xml><?xml version="1.0" encoding="utf-8"?>
+<p:notes xmlns:a="http://schemas.openxmlformats.org/drawingml/2006/main" xmlns:p="http://schemas.openxmlformats.org/presentationml/2006/main" xmlns:r="http://schemas.openxmlformats.org/officeDocument/2006/relationships">
+  <p:cSld>
+    <p:spTree>
+      <p:nvGrpSpPr>
+        <p:cNvPr id="1" name=""/>
+        <p:cNvGrpSpPr/>
+        <p:nvPr/>
+      </p:nvGrpSpPr>
+      <p:grpSpPr>
+        <a:xfrm>
+          <a:off x="0" y="0"/>
+          <a:ext cx="0" cy="0"/>
+          <a:chOff x="0" y="0"/>
+          <a:chExt cx="0" cy="0"/>
+        </a:xfrm>
+      </p:grpSpPr>
+      <p:sp>
+        <p:nvSpPr>
+          <p:cNvPr id="2" name="Slide Image Placeholder 1"/>
+          <p:cNvSpPr>
+            <a:spLocks noGrp="1"/>
+          </p:cNvSpPr>
+          <p:nvPr>
+            <p:ph type="sldImg" idx="2"/>
+          </p:nvPr>
+        </p:nvSpPr>
+        <p:spPr/>
+      </p:sp>
+      <p:sp>
+        <p:nvSpPr>
+          <p:cNvPr id="3" name="Notes Placeholder 2"/>
+          <p:cNvSpPr>
+            <a:spLocks noGrp="1"/>
+          </p:cNvSpPr>
+          <p:nvPr>
+            <p:ph type="body" idx="3" sz="quarter"/>
+          </p:nvPr>
+        </p:nvSpPr>
+        <p:spPr/>
+        <p:txBody>
+          <a:bodyPr/>
+          <a:lstStyle/>
+          <a:p>
+            <a:r>
+              <a:t>Esta es la demo estrella: el botón de pánico granular. El operador selecciona qué fases pasan a Modo Eco, confirma, y el webhook propaga la orden al breaker. Servidores críticos siguen intactos. Iluminación, climatización y cargadores se reducen un 40 por ciento al instante. La acción se anuncia con aria-live para lectores de pantalla.</a:t>
+            </a:r>
+          </a:p>
+        </p:txBody>
+      </p:sp>
+      <p:sp>
+        <p:nvSpPr>
+          <p:cNvPr id="4" name="Slide Number Placeholder 3"/>
+          <p:cNvSpPr>
+            <a:spLocks noGrp="1"/>
+          </p:cNvSpPr>
+          <p:nvPr>
+            <p:ph type="sldNum" idx="5" sz="quarter"/>
+          </p:nvPr>
+        </p:nvSpPr>
+        <p:spPr/>
+      </p:sp>
+    </p:spTree>
+  </p:cSld>
+  <p:clrMapOvr>
+    <a:masterClrMapping/>
+  </p:clrMapOvr>
+</p:notes>
+</file>
+
+<file path=ppt/notesSlides/notesSlide6.xml><?xml version="1.0" encoding="utf-8"?>
+<p:notes xmlns:a="http://schemas.openxmlformats.org/drawingml/2006/main" xmlns:p="http://schemas.openxmlformats.org/presentationml/2006/main" xmlns:r="http://schemas.openxmlformats.org/officeDocument/2006/relationships">
+  <p:cSld>
+    <p:spTree>
+      <p:nvGrpSpPr>
+        <p:cNvPr id="1" name=""/>
+        <p:cNvGrpSpPr/>
+        <p:nvPr/>
+      </p:nvGrpSpPr>
+      <p:grpSpPr>
+        <a:xfrm>
+          <a:off x="0" y="0"/>
+          <a:ext cx="0" cy="0"/>
+          <a:chOff x="0" y="0"/>
+          <a:chExt cx="0" cy="0"/>
+        </a:xfrm>
+      </p:grpSpPr>
+      <p:sp>
+        <p:nvSpPr>
+          <p:cNvPr id="2" name="Slide Image Placeholder 1"/>
+          <p:cNvSpPr>
+            <a:spLocks noGrp="1"/>
+          </p:cNvSpPr>
+          <p:nvPr>
+            <p:ph type="sldImg" idx="2"/>
+          </p:nvPr>
+        </p:nvSpPr>
+        <p:spPr/>
+      </p:sp>
+      <p:sp>
+        <p:nvSpPr>
+          <p:cNvPr id="3" name="Notes Placeholder 2"/>
+          <p:cNvSpPr>
+            <a:spLocks noGrp="1"/>
+          </p:cNvSpPr>
+          <p:nvPr>
+            <p:ph type="body" idx="3" sz="quarter"/>
+          </p:nvPr>
+        </p:nvSpPr>
+        <p:spPr/>
+        <p:txBody>
+          <a:bodyPr/>
+          <a:lstStyle/>
+          <a:p>
+            <a:r>
+              <a:t>La arquitectura del MVP es simple a propósito. Streamlit consume un Mock API local que simula los breakers y los precios SIOS, y un stub de Kiro orquesta el fan-out a Modo Eco. Todo se levanta con dos comandos. La lógica está cubierta con TDD y diez propiedades verificadas con Hypothesis.</a:t>
+            </a:r>
+          </a:p>
+        </p:txBody>
+      </p:sp>
+      <p:sp>
+        <p:nvSpPr>
+          <p:cNvPr id="4" name="Slide Number Placeholder 3"/>
+          <p:cNvSpPr>
+            <a:spLocks noGrp="1"/>
+          </p:cNvSpPr>
+          <p:nvPr>
+            <p:ph type="sldNum" idx="5" sz="quarter"/>
+          </p:nvPr>
+        </p:nvSpPr>
+        <p:spPr/>
+      </p:sp>
+    </p:spTree>
+  </p:cSld>
+  <p:clrMapOvr>
+    <a:masterClrMapping/>
+  </p:clrMapOvr>
+</p:notes>
+</file>
+
+<file path=ppt/notesSlides/notesSlide7.xml><?xml version="1.0" encoding="utf-8"?>
+<p:notes xmlns:a="http://schemas.openxmlformats.org/drawingml/2006/main" xmlns:p="http://schemas.openxmlformats.org/presentationml/2006/main" xmlns:r="http://schemas.openxmlformats.org/officeDocument/2006/relationships">
+  <p:cSld>
+    <p:spTree>
+      <p:nvGrpSpPr>
+        <p:cNvPr id="1" name=""/>
+        <p:cNvGrpSpPr/>
+        <p:nvPr/>
+      </p:nvGrpSpPr>
+      <p:grpSpPr>
+        <a:xfrm>
+          <a:off x="0" y="0"/>
+          <a:ext cx="0" cy="0"/>
+          <a:chOff x="0" y="0"/>
+          <a:chExt cx="0" cy="0"/>
+        </a:xfrm>
+      </p:grpSpPr>
+      <p:sp>
+        <p:nvSpPr>
+          <p:cNvPr id="2" name="Slide Image Placeholder 1"/>
+          <p:cNvSpPr>
+            <a:spLocks noGrp="1"/>
+          </p:cNvSpPr>
+          <p:nvPr>
+            <p:ph type="sldImg" idx="2"/>
+          </p:nvPr>
+        </p:nvSpPr>
+        <p:spPr/>
+      </p:sp>
+      <p:sp>
+        <p:nvSpPr>
+          <p:cNvPr id="3" name="Notes Placeholder 2"/>
+          <p:cNvSpPr>
+            <a:spLocks noGrp="1"/>
+          </p:cNvSpPr>
+          <p:nvPr>
+            <p:ph type="body" idx="3" sz="quarter"/>
+          </p:nvPr>
+        </p:nvSpPr>
+        <p:spPr/>
+        <p:txBody>
+          <a:bodyPr/>
+          <a:lstStyle/>
+          <a:p>
+            <a:r>
+              <a:t>Para producción, llevamos exactamente la misma lógica a AWS. Los breakers publican por MQTT a IoT Core con TLS mutuo. Las reglas disparan funciones Lambda que escriben en Timestream y, si detectan una anomalía, llaman al endpoint de Modo Eco. El frontend Streamlit corre en Fargate detrás de CloudFront y Cognito. Greengrass es opcional para autonomía sin red.</a:t>
+            </a:r>
+          </a:p>
+        </p:txBody>
+      </p:sp>
+      <p:sp>
+        <p:nvSpPr>
+          <p:cNvPr id="4" name="Slide Number Placeholder 3"/>
+          <p:cNvSpPr>
+            <a:spLocks noGrp="1"/>
+          </p:cNvSpPr>
+          <p:nvPr>
+            <p:ph type="sldNum" idx="5" sz="quarter"/>
+          </p:nvPr>
+        </p:nvSpPr>
+        <p:spPr/>
+      </p:sp>
+    </p:spTree>
+  </p:cSld>
+  <p:clrMapOvr>
+    <a:masterClrMapping/>
+  </p:clrMapOvr>
+</p:notes>
+</file>
+
+<file path=ppt/notesSlides/notesSlide8.xml><?xml version="1.0" encoding="utf-8"?>
+<p:notes xmlns:a="http://schemas.openxmlformats.org/drawingml/2006/main" xmlns:p="http://schemas.openxmlformats.org/presentationml/2006/main" xmlns:r="http://schemas.openxmlformats.org/officeDocument/2006/relationships">
+  <p:cSld>
+    <p:spTree>
+      <p:nvGrpSpPr>
+        <p:cNvPr id="1" name=""/>
+        <p:cNvGrpSpPr/>
+        <p:nvPr/>
+      </p:nvGrpSpPr>
+      <p:grpSpPr>
+        <a:xfrm>
+          <a:off x="0" y="0"/>
+          <a:ext cx="0" cy="0"/>
+          <a:chOff x="0" y="0"/>
+          <a:chExt cx="0" cy="0"/>
+        </a:xfrm>
+      </p:grpSpPr>
+      <p:sp>
+        <p:nvSpPr>
+          <p:cNvPr id="2" name="Slide Image Placeholder 1"/>
+          <p:cNvSpPr>
+            <a:spLocks noGrp="1"/>
+          </p:cNvSpPr>
+          <p:nvPr>
+            <p:ph type="sldImg" idx="2"/>
+          </p:nvPr>
+        </p:nvSpPr>
+        <p:spPr/>
+      </p:sp>
+      <p:sp>
+        <p:nvSpPr>
+          <p:cNvPr id="3" name="Notes Placeholder 2"/>
+          <p:cNvSpPr>
+            <a:spLocks noGrp="1"/>
+          </p:cNvSpPr>
+          <p:nvPr>
+            <p:ph type="body" idx="3" sz="quarter"/>
+          </p:nvPr>
+        </p:nvSpPr>
+        <p:spPr/>
+        <p:txBody>
+          <a:bodyPr/>
+          <a:lstStyle/>
+          <a:p>
+            <a:r>
+              <a:t>Y aquí está el argumento de venta: en los tres tramos el ahorro supera al coste por más de siete a uno. Una pyme paga noventa y cinco euros al mes en AWS y se ahorra setecientos veinte. Una mediana paga trescientos ochenta y se ahorra cuatro mil doscientos. Un cliente corporativo paga mil ochocientos cincuenta y se ahorra veintiséis mil. ROI positivo desde el primer mes.</a:t>
+            </a:r>
+          </a:p>
+        </p:txBody>
+      </p:sp>
+      <p:sp>
+        <p:nvSpPr>
+          <p:cNvPr id="4" name="Slide Number Placeholder 3"/>
+          <p:cNvSpPr>
+            <a:spLocks noGrp="1"/>
+          </p:cNvSpPr>
+          <p:nvPr>
+            <p:ph type="sldNum" idx="5" sz="quarter"/>
+          </p:nvPr>
+        </p:nvSpPr>
+        <p:spPr/>
+      </p:sp>
+    </p:spTree>
+  </p:cSld>
+  <p:clrMapOvr>
+    <a:masterClrMapping/>
+  </p:clrMapOvr>
+</p:notes>
+</file>
+
+<file path=ppt/notesSlides/notesSlide9.xml><?xml version="1.0" encoding="utf-8"?>
+<p:notes xmlns:a="http://schemas.openxmlformats.org/drawingml/2006/main" xmlns:p="http://schemas.openxmlformats.org/presentationml/2006/main" xmlns:r="http://schemas.openxmlformats.org/officeDocument/2006/relationships">
+  <p:cSld>
+    <p:spTree>
+      <p:nvGrpSpPr>
+        <p:cNvPr id="1" name=""/>
+        <p:cNvGrpSpPr/>
+        <p:nvPr/>
+      </p:nvGrpSpPr>
+      <p:grpSpPr>
+        <a:xfrm>
+          <a:off x="0" y="0"/>
+          <a:ext cx="0" cy="0"/>
+          <a:chOff x="0" y="0"/>
+          <a:chExt cx="0" cy="0"/>
+        </a:xfrm>
+      </p:grpSpPr>
+      <p:sp>
+        <p:nvSpPr>
+          <p:cNvPr id="2" name="Slide Image Placeholder 1"/>
+          <p:cNvSpPr>
+            <a:spLocks noGrp="1"/>
+          </p:cNvSpPr>
+          <p:nvPr>
+            <p:ph type="sldImg" idx="2"/>
+          </p:nvPr>
+        </p:nvSpPr>
+        <p:spPr/>
+      </p:sp>
+      <p:sp>
+        <p:nvSpPr>
+          <p:cNvPr id="3" name="Notes Placeholder 2"/>
+          <p:cNvSpPr>
+            <a:spLocks noGrp="1"/>
+          </p:cNvSpPr>
+          <p:nvPr>
+            <p:ph type="body" idx="3" sz="quarter"/>
+          </p:nvPr>
+        </p:nvSpPr>
+        <p:spPr/>
+        <p:txBody>
+          <a:bodyPr/>
+          <a:lstStyle/>
+          <a:p>
+            <a:r>
+              <a:t>Si os preguntáis a dónde va cada euro: Timestream y Fargate son los servicios más pesados, IoT Core suma poco gracias a la tarifa por millón de mensajes, y Lambda apenas pesa. No hay licencias por dispositivo ni compromisos anuales. Con Savings Plans bajamos otro veinte a cuarenta por ciento. Cero sorpresas en factura.</a:t>
+            </a:r>
+          </a:p>
+        </p:txBody>
+      </p:sp>
+      <p:sp>
+        <p:nvSpPr>
+          <p:cNvPr id="4" name="Slide Number Placeholder 3"/>
+          <p:cNvSpPr>
+            <a:spLocks noGrp="1"/>
+          </p:cNvSpPr>
+          <p:nvPr>
+            <p:ph type="sldNum" idx="5" sz="quarter"/>
+          </p:nvPr>
+        </p:nvSpPr>
+        <p:spPr/>
+      </p:sp>
+    </p:spTree>
+  </p:cSld>
+  <p:clrMapOvr>
+    <a:masterClrMapping/>
+  </p:clrMapOvr>
+</p:notes>
 </file>
 
 <file path=ppt/slideLayouts/slideLayout1.xml><?xml version="1.0" encoding="utf-8"?>
@@ -3563,7 +4824,7 @@
                 </a:solidFill>
                 <a:latin typeface="Calibri"/>
               </a:rPr>
-              <a:t>HACIA DÓNDE VA</a:t>
+              <a:t>IMPACTO</a:t>
             </a:r>
           </a:p>
         </p:txBody>
@@ -3598,7 +4859,7 @@
                 </a:solidFill>
                 <a:latin typeface="Calibri"/>
               </a:rPr>
-              <a:t>Roadmap del MVP al producto</a:t>
+              <a:t>Ahorro medible por categoría de carga</a:t>
             </a:r>
           </a:p>
         </p:txBody>
@@ -3633,7 +4894,7 @@
                 </a:solidFill>
                 <a:latin typeface="Calibri"/>
               </a:rPr>
-              <a:t>Hoy: hackathon. Mañana: piloto real con breakers físicos.</a:t>
+              <a:t>Ejemplo de un edificio piloto: 4 fases activadas en Modo Eco durante 1 hora</a:t>
             </a:r>
           </a:p>
         </p:txBody>
@@ -3703,14 +4964,14 @@
                 </a:solidFill>
                 <a:latin typeface="Calibri"/>
               </a:rPr>
-              <a:t>10 / 12</a:t>
+              <a:t>10 / 13</a:t>
             </a:r>
           </a:p>
         </p:txBody>
       </p:sp>
       <p:pic>
         <p:nvPicPr>
-          <p:cNvPr id="9" name="Picture 8" descr="roadmap.png"/>
+          <p:cNvPr id="9" name="Picture 8" descr="savings_chart.png"/>
           <p:cNvPicPr>
             <a:picLocks noChangeAspect="1"/>
           </p:cNvPicPr>
@@ -3724,14 +4985,162 @@
         </p:blipFill>
         <p:spPr>
           <a:xfrm>
-            <a:off x="457200" y="2286000"/>
-            <a:ext cx="11247120" cy="4016829"/>
+            <a:off x="640080" y="2103120"/>
+            <a:ext cx="7772400" cy="4663440"/>
           </a:xfrm>
           <a:prstGeom prst="rect">
             <a:avLst/>
           </a:prstGeom>
         </p:spPr>
       </p:pic>
+      <p:sp>
+        <p:nvSpPr>
+          <p:cNvPr id="10" name="TextBox 9"/>
+          <p:cNvSpPr txBox="1"/>
+          <p:nvPr/>
+        </p:nvSpPr>
+        <p:spPr>
+          <a:xfrm>
+            <a:off x="8595360" y="2286000"/>
+            <a:ext cx="3108960" cy="4114800"/>
+          </a:xfrm>
+          <a:prstGeom prst="rect">
+            <a:avLst/>
+          </a:prstGeom>
+          <a:noFill/>
+        </p:spPr>
+        <p:txBody>
+          <a:bodyPr wrap="square" lIns="0">
+            <a:spAutoFit/>
+          </a:bodyPr>
+          <a:lstStyle/>
+          <a:p>
+            <a:pPr algn="l">
+              <a:spcAft>
+                <a:spcPts val="800"/>
+              </a:spcAft>
+            </a:pPr>
+            <a:r>
+              <a:rPr sz="1500" b="1">
+                <a:solidFill>
+                  <a:srgbClr val="2E8B57"/>
+                </a:solidFill>
+                <a:latin typeface="Calibri"/>
+              </a:rPr>
+              <a:t>▎ </a:t>
+            </a:r>
+            <a:r>
+              <a:rPr sz="1500">
+                <a:solidFill>
+                  <a:srgbClr val="1F2A24"/>
+                </a:solidFill>
+                <a:latin typeface="Calibri"/>
+              </a:rPr>
+              <a:t>−40% por fase activada.</a:t>
+            </a:r>
+          </a:p>
+          <a:p>
+            <a:pPr algn="l">
+              <a:spcAft>
+                <a:spcPts val="800"/>
+              </a:spcAft>
+            </a:pPr>
+            <a:r>
+              <a:rPr sz="1500" b="1">
+                <a:solidFill>
+                  <a:srgbClr val="2E8B57"/>
+                </a:solidFill>
+                <a:latin typeface="Calibri"/>
+              </a:rPr>
+              <a:t>▎ </a:t>
+            </a:r>
+            <a:r>
+              <a:rPr sz="1500">
+                <a:solidFill>
+                  <a:srgbClr val="1F2A24"/>
+                </a:solidFill>
+                <a:latin typeface="Calibri"/>
+              </a:rPr>
+              <a:t>Reducción proporcional de €/h.</a:t>
+            </a:r>
+          </a:p>
+          <a:p>
+            <a:pPr algn="l">
+              <a:spcAft>
+                <a:spcPts val="800"/>
+              </a:spcAft>
+            </a:pPr>
+            <a:r>
+              <a:rPr sz="1500" b="1">
+                <a:solidFill>
+                  <a:srgbClr val="2E8B57"/>
+                </a:solidFill>
+                <a:latin typeface="Calibri"/>
+              </a:rPr>
+              <a:t>▎ </a:t>
+            </a:r>
+            <a:r>
+              <a:rPr sz="1500">
+                <a:solidFill>
+                  <a:srgbClr val="1F2A24"/>
+                </a:solidFill>
+                <a:latin typeface="Calibri"/>
+              </a:rPr>
+              <a:t>Menos huella de CO₂ inmediata.</a:t>
+            </a:r>
+          </a:p>
+          <a:p>
+            <a:pPr algn="l">
+              <a:spcAft>
+                <a:spcPts val="800"/>
+              </a:spcAft>
+            </a:pPr>
+            <a:r>
+              <a:rPr sz="1500" b="1">
+                <a:solidFill>
+                  <a:srgbClr val="2E8B57"/>
+                </a:solidFill>
+                <a:latin typeface="Calibri"/>
+              </a:rPr>
+              <a:t>▎ </a:t>
+            </a:r>
+            <a:r>
+              <a:rPr sz="1500">
+                <a:solidFill>
+                  <a:srgbClr val="1F2A24"/>
+                </a:solidFill>
+                <a:latin typeface="Calibri"/>
+              </a:rPr>
+              <a:t>Sin tocar servidores críticos.</a:t>
+            </a:r>
+          </a:p>
+          <a:p>
+            <a:pPr algn="l">
+              <a:spcAft>
+                <a:spcPts val="800"/>
+              </a:spcAft>
+            </a:pPr>
+            <a:r>
+              <a:rPr sz="1500" b="1">
+                <a:solidFill>
+                  <a:srgbClr val="2E8B57"/>
+                </a:solidFill>
+                <a:latin typeface="Calibri"/>
+              </a:rPr>
+              <a:t>▎ </a:t>
+            </a:r>
+            <a:r>
+              <a:rPr sz="1500">
+                <a:solidFill>
+                  <a:srgbClr val="1F2A24"/>
+                </a:solidFill>
+                <a:latin typeface="Calibri"/>
+              </a:rPr>
+              <a:t>Auditable: cada acción queda registrada.</a:t>
+            </a:r>
+          </a:p>
+        </p:txBody>
+      </p:sp>
     </p:spTree>
   </p:cSld>
   <p:clrMapOvr>
@@ -3867,7 +5276,7 @@
                 </a:solidFill>
                 <a:latin typeface="Calibri"/>
               </a:rPr>
-              <a:t>FRENTE A ALTERNATIVAS</a:t>
+              <a:t>HACIA DÓNDE VA</a:t>
             </a:r>
           </a:p>
         </p:txBody>
@@ -3902,7 +5311,7 @@
                 </a:solidFill>
                 <a:latin typeface="Calibri"/>
               </a:rPr>
-              <a:t>Lo que nos diferencia de otros proyectos del hackathon</a:t>
+              <a:t>Roadmap del MVP al producto</a:t>
             </a:r>
           </a:p>
         </p:txBody>
@@ -3937,7 +5346,7 @@
                 </a:solidFill>
                 <a:latin typeface="Calibri"/>
               </a:rPr>
-              <a:t>Foco en acción, no solo en visualización</a:t>
+              <a:t>Hoy: hackathon. Mañana: piloto real con breakers físicos.</a:t>
             </a:r>
           </a:p>
         </p:txBody>
@@ -4007,159 +5416,35 @@
                 </a:solidFill>
                 <a:latin typeface="Calibri"/>
               </a:rPr>
-              <a:t>11 / 12</a:t>
-            </a:r>
-          </a:p>
-        </p:txBody>
-      </p:sp>
-      <p:sp>
-        <p:nvSpPr>
-          <p:cNvPr id="9" name="TextBox 8"/>
-          <p:cNvSpPr txBox="1"/>
-          <p:nvPr/>
-        </p:nvSpPr>
-        <p:spPr>
-          <a:xfrm>
-            <a:off x="640080" y="2377440"/>
-            <a:ext cx="10972800" cy="3657600"/>
-          </a:xfrm>
-          <a:prstGeom prst="rect">
-            <a:avLst/>
-          </a:prstGeom>
-          <a:noFill/>
-        </p:spPr>
-        <p:txBody>
-          <a:bodyPr wrap="square" lIns="0">
-            <a:spAutoFit/>
-          </a:bodyPr>
-          <a:lstStyle/>
-          <a:p>
-            <a:pPr algn="l">
-              <a:spcAft>
-                <a:spcPts val="800"/>
-              </a:spcAft>
-            </a:pPr>
-            <a:r>
-              <a:rPr sz="1800" b="1">
-                <a:solidFill>
-                  <a:srgbClr val="2E8B57"/>
-                </a:solidFill>
-                <a:latin typeface="Calibri"/>
-              </a:rPr>
-              <a:t>▎ </a:t>
-            </a:r>
-            <a:r>
-              <a:rPr sz="1800">
-                <a:solidFill>
-                  <a:srgbClr val="1F2A24"/>
-                </a:solidFill>
-                <a:latin typeface="Calibri"/>
-              </a:rPr>
-              <a:t>Otros muestran datos: nosotros además accionamos el Modo Eco en segundos.</a:t>
-            </a:r>
-          </a:p>
-          <a:p>
-            <a:pPr algn="l">
-              <a:spcAft>
-                <a:spcPts val="800"/>
-              </a:spcAft>
-            </a:pPr>
-            <a:r>
-              <a:rPr sz="1800" b="1">
-                <a:solidFill>
-                  <a:srgbClr val="2E8B57"/>
-                </a:solidFill>
-                <a:latin typeface="Calibri"/>
-              </a:rPr>
-              <a:t>▎ </a:t>
-            </a:r>
-            <a:r>
-              <a:rPr sz="1800">
-                <a:solidFill>
-                  <a:srgbClr val="1F2A24"/>
-                </a:solidFill>
-                <a:latin typeface="Calibri"/>
-              </a:rPr>
-              <a:t>Granularidad por fase, no por edificio entero (cargas críticas siempre seguras).</a:t>
-            </a:r>
-          </a:p>
-          <a:p>
-            <a:pPr algn="l">
-              <a:spcAft>
-                <a:spcPts val="800"/>
-              </a:spcAft>
-            </a:pPr>
-            <a:r>
-              <a:rPr sz="1800" b="1">
-                <a:solidFill>
-                  <a:srgbClr val="2E8B57"/>
-                </a:solidFill>
-                <a:latin typeface="Calibri"/>
-              </a:rPr>
-              <a:t>▎ </a:t>
-            </a:r>
-            <a:r>
-              <a:rPr sz="1800">
-                <a:solidFill>
-                  <a:srgbClr val="1F2A24"/>
-                </a:solidFill>
-                <a:latin typeface="Calibri"/>
-              </a:rPr>
-              <a:t>Stack 100% open-source y reproducible en local sin cuentas cloud.</a:t>
-            </a:r>
-          </a:p>
-          <a:p>
-            <a:pPr algn="l">
-              <a:spcAft>
-                <a:spcPts val="800"/>
-              </a:spcAft>
-            </a:pPr>
-            <a:r>
-              <a:rPr sz="1800" b="1">
-                <a:solidFill>
-                  <a:srgbClr val="2E8B57"/>
-                </a:solidFill>
-                <a:latin typeface="Calibri"/>
-              </a:rPr>
-              <a:t>▎ </a:t>
-            </a:r>
-            <a:r>
-              <a:rPr sz="1800">
-                <a:solidFill>
-                  <a:srgbClr val="1F2A24"/>
-                </a:solidFill>
-                <a:latin typeface="Calibri"/>
-              </a:rPr>
-              <a:t>Accesibilidad WCAG AA desde el día 1, no como capa cosmética.</a:t>
-            </a:r>
-          </a:p>
-          <a:p>
-            <a:pPr algn="l">
-              <a:spcAft>
-                <a:spcPts val="800"/>
-              </a:spcAft>
-            </a:pPr>
-            <a:r>
-              <a:rPr sz="1800" b="1">
-                <a:solidFill>
-                  <a:srgbClr val="2E8B57"/>
-                </a:solidFill>
-                <a:latin typeface="Calibri"/>
-              </a:rPr>
-              <a:t>▎ </a:t>
-            </a:r>
-            <a:r>
-              <a:rPr sz="1800">
-                <a:solidFill>
-                  <a:srgbClr val="1F2A24"/>
-                </a:solidFill>
-                <a:latin typeface="Calibri"/>
-              </a:rPr>
-              <a:t>TDD con propiedades formales: 10 invariantes verificadas con Hypothesis.</a:t>
-            </a:r>
-          </a:p>
-        </p:txBody>
-      </p:sp>
+              <a:t>11 / 13</a:t>
+            </a:r>
+          </a:p>
+        </p:txBody>
+      </p:sp>
+      <p:pic>
+        <p:nvPicPr>
+          <p:cNvPr id="9" name="Picture 8" descr="roadmap.png"/>
+          <p:cNvPicPr>
+            <a:picLocks noChangeAspect="1"/>
+          </p:cNvPicPr>
+          <p:nvPr/>
+        </p:nvPicPr>
+        <p:blipFill>
+          <a:blip r:embed="rId2"/>
+          <a:stretch>
+            <a:fillRect/>
+          </a:stretch>
+        </p:blipFill>
+        <p:spPr>
+          <a:xfrm>
+            <a:off x="457200" y="2286000"/>
+            <a:ext cx="11247120" cy="4016829"/>
+          </a:xfrm>
+          <a:prstGeom prst="rect">
+            <a:avLst/>
+          </a:prstGeom>
+        </p:spPr>
+      </p:pic>
     </p:spTree>
   </p:cSld>
   <p:clrMapOvr>
@@ -4193,6 +5478,434 @@
             <a:avLst/>
           </a:prstGeom>
           <a:solidFill>
+            <a:srgbClr val="F5EFE0"/>
+          </a:solidFill>
+          <a:ln>
+            <a:noFill/>
+          </a:ln>
+          <a:effectLst/>
+        </p:spPr>
+        <p:style>
+          <a:lnRef idx="1">
+            <a:schemeClr val="accent1"/>
+          </a:lnRef>
+          <a:fillRef idx="3">
+            <a:schemeClr val="accent1"/>
+          </a:fillRef>
+          <a:effectRef idx="2">
+            <a:schemeClr val="accent1"/>
+          </a:effectRef>
+          <a:fontRef idx="minor">
+            <a:schemeClr val="lt1"/>
+          </a:fontRef>
+        </p:style>
+        <p:txBody>
+          <a:bodyPr rtlCol="0" anchor="ctr"/>
+          <a:lstStyle/>
+          <a:p>
+            <a:pPr algn="ctr"/>
+          </a:p>
+        </p:txBody>
+      </p:sp>
+      <p:sp>
+        <p:nvSpPr>
+          <p:cNvPr id="3" name="Rectangle 2"/>
+          <p:cNvSpPr/>
+          <p:nvPr/>
+        </p:nvSpPr>
+        <p:spPr>
+          <a:xfrm>
+            <a:off x="0" y="0"/>
+            <a:ext cx="320040" cy="6858000"/>
+          </a:xfrm>
+          <a:prstGeom prst="rect">
+            <a:avLst/>
+          </a:prstGeom>
+          <a:solidFill>
+            <a:srgbClr val="104F3A"/>
+          </a:solidFill>
+          <a:ln>
+            <a:noFill/>
+          </a:ln>
+        </p:spPr>
+        <p:style>
+          <a:lnRef idx="1">
+            <a:schemeClr val="accent1"/>
+          </a:lnRef>
+          <a:fillRef idx="3">
+            <a:schemeClr val="accent1"/>
+          </a:fillRef>
+          <a:effectRef idx="2">
+            <a:schemeClr val="accent1"/>
+          </a:effectRef>
+          <a:fontRef idx="minor">
+            <a:schemeClr val="lt1"/>
+          </a:fontRef>
+        </p:style>
+        <p:txBody>
+          <a:bodyPr rtlCol="0" anchor="ctr"/>
+          <a:lstStyle/>
+          <a:p>
+            <a:pPr algn="ctr"/>
+          </a:p>
+        </p:txBody>
+      </p:sp>
+      <p:sp>
+        <p:nvSpPr>
+          <p:cNvPr id="4" name="TextBox 3"/>
+          <p:cNvSpPr txBox="1"/>
+          <p:nvPr/>
+        </p:nvSpPr>
+        <p:spPr>
+          <a:xfrm>
+            <a:off x="640080" y="457200"/>
+            <a:ext cx="10972800" cy="365760"/>
+          </a:xfrm>
+          <a:prstGeom prst="rect">
+            <a:avLst/>
+          </a:prstGeom>
+          <a:noFill/>
+        </p:spPr>
+        <p:txBody>
+          <a:bodyPr wrap="square" anchor="t" lIns="0" rIns="0" tIns="0" bIns="0">
+            <a:spAutoFit/>
+          </a:bodyPr>
+          <a:lstStyle/>
+          <a:p>
+            <a:pPr algn="l"/>
+            <a:r>
+              <a:rPr sz="1200" b="1">
+                <a:solidFill>
+                  <a:srgbClr val="2E8B57"/>
+                </a:solidFill>
+                <a:latin typeface="Calibri"/>
+              </a:rPr>
+              <a:t>FRENTE A ALTERNATIVAS</a:t>
+            </a:r>
+          </a:p>
+        </p:txBody>
+      </p:sp>
+      <p:sp>
+        <p:nvSpPr>
+          <p:cNvPr id="5" name="TextBox 4"/>
+          <p:cNvSpPr txBox="1"/>
+          <p:nvPr/>
+        </p:nvSpPr>
+        <p:spPr>
+          <a:xfrm>
+            <a:off x="640080" y="777240"/>
+            <a:ext cx="10972800" cy="822960"/>
+          </a:xfrm>
+          <a:prstGeom prst="rect">
+            <a:avLst/>
+          </a:prstGeom>
+          <a:noFill/>
+        </p:spPr>
+        <p:txBody>
+          <a:bodyPr wrap="square" anchor="t" lIns="0" rIns="0" tIns="0" bIns="0">
+            <a:spAutoFit/>
+          </a:bodyPr>
+          <a:lstStyle/>
+          <a:p>
+            <a:pPr algn="l"/>
+            <a:r>
+              <a:rPr sz="3400" b="1">
+                <a:solidFill>
+                  <a:srgbClr val="104F3A"/>
+                </a:solidFill>
+                <a:latin typeface="Calibri"/>
+              </a:rPr>
+              <a:t>Lo que nos diferencia de otros proyectos del hackathon</a:t>
+            </a:r>
+          </a:p>
+        </p:txBody>
+      </p:sp>
+      <p:sp>
+        <p:nvSpPr>
+          <p:cNvPr id="6" name="TextBox 5"/>
+          <p:cNvSpPr txBox="1"/>
+          <p:nvPr/>
+        </p:nvSpPr>
+        <p:spPr>
+          <a:xfrm>
+            <a:off x="640080" y="1554480"/>
+            <a:ext cx="10972800" cy="548640"/>
+          </a:xfrm>
+          <a:prstGeom prst="rect">
+            <a:avLst/>
+          </a:prstGeom>
+          <a:noFill/>
+        </p:spPr>
+        <p:txBody>
+          <a:bodyPr wrap="square" anchor="t" lIns="0" rIns="0" tIns="0" bIns="0">
+            <a:spAutoFit/>
+          </a:bodyPr>
+          <a:lstStyle/>
+          <a:p>
+            <a:pPr algn="l"/>
+            <a:r>
+              <a:rPr sz="1800" b="0">
+                <a:solidFill>
+                  <a:srgbClr val="4B5A52"/>
+                </a:solidFill>
+                <a:latin typeface="Calibri"/>
+              </a:rPr>
+              <a:t>Foco en acción, no solo en visualización</a:t>
+            </a:r>
+          </a:p>
+        </p:txBody>
+      </p:sp>
+      <p:sp>
+        <p:nvSpPr>
+          <p:cNvPr id="7" name="TextBox 6"/>
+          <p:cNvSpPr txBox="1"/>
+          <p:nvPr/>
+        </p:nvSpPr>
+        <p:spPr>
+          <a:xfrm>
+            <a:off x="457200" y="6446520"/>
+            <a:ext cx="7315200" cy="320040"/>
+          </a:xfrm>
+          <a:prstGeom prst="rect">
+            <a:avLst/>
+          </a:prstGeom>
+          <a:noFill/>
+        </p:spPr>
+        <p:txBody>
+          <a:bodyPr wrap="square" anchor="t" lIns="0" rIns="0" tIns="0" bIns="0">
+            <a:spAutoFit/>
+          </a:bodyPr>
+          <a:lstStyle/>
+          <a:p>
+            <a:pPr algn="l"/>
+            <a:r>
+              <a:rPr sz="1100" b="0">
+                <a:solidFill>
+                  <a:srgbClr val="4B5A52"/>
+                </a:solidFill>
+                <a:latin typeface="Calibri"/>
+              </a:rPr>
+              <a:t>Energy Hunter · Hackathon Demo</a:t>
+            </a:r>
+          </a:p>
+        </p:txBody>
+      </p:sp>
+      <p:sp>
+        <p:nvSpPr>
+          <p:cNvPr id="8" name="TextBox 7"/>
+          <p:cNvSpPr txBox="1"/>
+          <p:nvPr/>
+        </p:nvSpPr>
+        <p:spPr>
+          <a:xfrm>
+            <a:off x="10515600" y="6446520"/>
+            <a:ext cx="1280160" cy="320040"/>
+          </a:xfrm>
+          <a:prstGeom prst="rect">
+            <a:avLst/>
+          </a:prstGeom>
+          <a:noFill/>
+        </p:spPr>
+        <p:txBody>
+          <a:bodyPr wrap="square" anchor="t" lIns="0" rIns="0" tIns="0" bIns="0">
+            <a:spAutoFit/>
+          </a:bodyPr>
+          <a:lstStyle/>
+          <a:p>
+            <a:pPr algn="r"/>
+            <a:r>
+              <a:rPr sz="1100" b="0">
+                <a:solidFill>
+                  <a:srgbClr val="4B5A52"/>
+                </a:solidFill>
+                <a:latin typeface="Calibri"/>
+              </a:rPr>
+              <a:t>12 / 13</a:t>
+            </a:r>
+          </a:p>
+        </p:txBody>
+      </p:sp>
+      <p:sp>
+        <p:nvSpPr>
+          <p:cNvPr id="9" name="TextBox 8"/>
+          <p:cNvSpPr txBox="1"/>
+          <p:nvPr/>
+        </p:nvSpPr>
+        <p:spPr>
+          <a:xfrm>
+            <a:off x="640080" y="2377440"/>
+            <a:ext cx="10972800" cy="3657600"/>
+          </a:xfrm>
+          <a:prstGeom prst="rect">
+            <a:avLst/>
+          </a:prstGeom>
+          <a:noFill/>
+        </p:spPr>
+        <p:txBody>
+          <a:bodyPr wrap="square" lIns="0">
+            <a:spAutoFit/>
+          </a:bodyPr>
+          <a:lstStyle/>
+          <a:p>
+            <a:pPr algn="l">
+              <a:spcAft>
+                <a:spcPts val="800"/>
+              </a:spcAft>
+            </a:pPr>
+            <a:r>
+              <a:rPr sz="1800" b="1">
+                <a:solidFill>
+                  <a:srgbClr val="2E8B57"/>
+                </a:solidFill>
+                <a:latin typeface="Calibri"/>
+              </a:rPr>
+              <a:t>▎ </a:t>
+            </a:r>
+            <a:r>
+              <a:rPr sz="1800">
+                <a:solidFill>
+                  <a:srgbClr val="1F2A24"/>
+                </a:solidFill>
+                <a:latin typeface="Calibri"/>
+              </a:rPr>
+              <a:t>Otros muestran datos: nosotros además accionamos el Modo Eco en segundos.</a:t>
+            </a:r>
+          </a:p>
+          <a:p>
+            <a:pPr algn="l">
+              <a:spcAft>
+                <a:spcPts val="800"/>
+              </a:spcAft>
+            </a:pPr>
+            <a:r>
+              <a:rPr sz="1800" b="1">
+                <a:solidFill>
+                  <a:srgbClr val="2E8B57"/>
+                </a:solidFill>
+                <a:latin typeface="Calibri"/>
+              </a:rPr>
+              <a:t>▎ </a:t>
+            </a:r>
+            <a:r>
+              <a:rPr sz="1800">
+                <a:solidFill>
+                  <a:srgbClr val="1F2A24"/>
+                </a:solidFill>
+                <a:latin typeface="Calibri"/>
+              </a:rPr>
+              <a:t>Granularidad por fase, no por edificio entero (cargas críticas siempre seguras).</a:t>
+            </a:r>
+          </a:p>
+          <a:p>
+            <a:pPr algn="l">
+              <a:spcAft>
+                <a:spcPts val="800"/>
+              </a:spcAft>
+            </a:pPr>
+            <a:r>
+              <a:rPr sz="1800" b="1">
+                <a:solidFill>
+                  <a:srgbClr val="2E8B57"/>
+                </a:solidFill>
+                <a:latin typeface="Calibri"/>
+              </a:rPr>
+              <a:t>▎ </a:t>
+            </a:r>
+            <a:r>
+              <a:rPr sz="1800">
+                <a:solidFill>
+                  <a:srgbClr val="1F2A24"/>
+                </a:solidFill>
+                <a:latin typeface="Calibri"/>
+              </a:rPr>
+              <a:t>Stack 100% open-source y reproducible en local sin cuentas cloud.</a:t>
+            </a:r>
+          </a:p>
+          <a:p>
+            <a:pPr algn="l">
+              <a:spcAft>
+                <a:spcPts val="800"/>
+              </a:spcAft>
+            </a:pPr>
+            <a:r>
+              <a:rPr sz="1800" b="1">
+                <a:solidFill>
+                  <a:srgbClr val="2E8B57"/>
+                </a:solidFill>
+                <a:latin typeface="Calibri"/>
+              </a:rPr>
+              <a:t>▎ </a:t>
+            </a:r>
+            <a:r>
+              <a:rPr sz="1800">
+                <a:solidFill>
+                  <a:srgbClr val="1F2A24"/>
+                </a:solidFill>
+                <a:latin typeface="Calibri"/>
+              </a:rPr>
+              <a:t>Accesibilidad WCAG AA desde el día 1, no como capa cosmética.</a:t>
+            </a:r>
+          </a:p>
+          <a:p>
+            <a:pPr algn="l">
+              <a:spcAft>
+                <a:spcPts val="800"/>
+              </a:spcAft>
+            </a:pPr>
+            <a:r>
+              <a:rPr sz="1800" b="1">
+                <a:solidFill>
+                  <a:srgbClr val="2E8B57"/>
+                </a:solidFill>
+                <a:latin typeface="Calibri"/>
+              </a:rPr>
+              <a:t>▎ </a:t>
+            </a:r>
+            <a:r>
+              <a:rPr sz="1800">
+                <a:solidFill>
+                  <a:srgbClr val="1F2A24"/>
+                </a:solidFill>
+                <a:latin typeface="Calibri"/>
+              </a:rPr>
+              <a:t>TDD con propiedades formales: 10 invariantes verificadas con Hypothesis.</a:t>
+            </a:r>
+          </a:p>
+        </p:txBody>
+      </p:sp>
+    </p:spTree>
+  </p:cSld>
+  <p:clrMapOvr>
+    <a:masterClrMapping/>
+  </p:clrMapOvr>
+</p:sld>
+</file>
+
+<file path=ppt/slides/slide13.xml><?xml version="1.0" encoding="utf-8"?>
+<p:sld xmlns:a="http://schemas.openxmlformats.org/drawingml/2006/main" xmlns:p="http://schemas.openxmlformats.org/presentationml/2006/main" xmlns:r="http://schemas.openxmlformats.org/officeDocument/2006/relationships">
+  <p:cSld>
+    <p:spTree>
+      <p:nvGrpSpPr>
+        <p:cNvPr id="1" name=""/>
+        <p:cNvGrpSpPr/>
+        <p:nvPr/>
+      </p:nvGrpSpPr>
+      <p:grpSpPr/>
+      <p:sp>
+        <p:nvSpPr>
+          <p:cNvPr id="2" name="Rectangle 1"/>
+          <p:cNvSpPr/>
+          <p:nvPr/>
+        </p:nvSpPr>
+        <p:spPr>
+          <a:xfrm>
+            <a:off x="0" y="0"/>
+            <a:ext cx="12191695" cy="6858000"/>
+          </a:xfrm>
+          <a:prstGeom prst="rect">
+            <a:avLst/>
+          </a:prstGeom>
+          <a:solidFill>
             <a:srgbClr val="104F3A"/>
           </a:solidFill>
           <a:ln>
@@ -4944,7 +6657,7 @@
                 </a:solidFill>
                 <a:latin typeface="Calibri"/>
               </a:rPr>
-              <a:t>2 / 12</a:t>
+              <a:t>2 / 13</a:t>
             </a:r>
           </a:p>
         </p:txBody>
@@ -5371,7 +7084,7 @@
                 </a:solidFill>
                 <a:latin typeface="Calibri"/>
               </a:rPr>
-              <a:t>3 / 12</a:t>
+              <a:t>3 / 13</a:t>
             </a:r>
           </a:p>
         </p:txBody>
@@ -5798,7 +7511,7 @@
                 </a:solidFill>
                 <a:latin typeface="Calibri"/>
               </a:rPr>
-              <a:t>4 / 12</a:t>
+              <a:t>4 / 13</a:t>
             </a:r>
           </a:p>
         </p:txBody>
@@ -7026,7 +8739,7 @@
                 </a:solidFill>
                 <a:latin typeface="Calibri"/>
               </a:rPr>
-              <a:t>5 / 12</a:t>
+              <a:t>5 / 13</a:t>
             </a:r>
           </a:p>
         </p:txBody>
@@ -7503,7 +9216,7 @@
                 </a:solidFill>
                 <a:latin typeface="Calibri"/>
               </a:rPr>
-              <a:t>6 / 12</a:t>
+              <a:t>6 / 13</a:t>
             </a:r>
           </a:p>
         </p:txBody>
@@ -7842,7 +9555,7 @@
                 </a:solidFill>
                 <a:latin typeface="Calibri"/>
               </a:rPr>
-              <a:t>7 / 12</a:t>
+              <a:t>7 / 13</a:t>
             </a:r>
           </a:p>
         </p:txBody>
@@ -8319,7 +10032,7 @@
                 </a:solidFill>
                 <a:latin typeface="Calibri"/>
               </a:rPr>
-              <a:t>8 / 12</a:t>
+              <a:t>8 / 13</a:t>
             </a:r>
           </a:p>
         </p:txBody>
@@ -8691,7 +10404,7 @@
                 </a:solidFill>
                 <a:latin typeface="Calibri"/>
               </a:rPr>
-              <a:t>IMPACTO</a:t>
+              <a:t>COSTE — DESGLOSE</a:t>
             </a:r>
           </a:p>
         </p:txBody>
@@ -8726,7 +10439,7 @@
                 </a:solidFill>
                 <a:latin typeface="Calibri"/>
               </a:rPr>
-              <a:t>Ahorro medible por categoría de carga</a:t>
+              <a:t>A dónde va cada euro que pagas a AWS</a:t>
             </a:r>
           </a:p>
         </p:txBody>
@@ -8761,7 +10474,7 @@
                 </a:solidFill>
                 <a:latin typeface="Calibri"/>
               </a:rPr>
-              <a:t>Ejemplo de un edificio piloto: 4 fases activadas en Modo Eco durante 1 hora</a:t>
+              <a:t>Sin sorpresas: 5 servicios, todos con tarifa pública y pago por uso</a:t>
             </a:r>
           </a:p>
         </p:txBody>
@@ -8831,14 +10544,14 @@
                 </a:solidFill>
                 <a:latin typeface="Calibri"/>
               </a:rPr>
-              <a:t>9 / 12</a:t>
+              <a:t>9 / 13</a:t>
             </a:r>
           </a:p>
         </p:txBody>
       </p:sp>
       <p:pic>
         <p:nvPicPr>
-          <p:cNvPr id="9" name="Picture 8" descr="savings_chart.png"/>
+          <p:cNvPr id="9" name="Picture 8" descr="aws_cost_breakdown.png"/>
           <p:cNvPicPr>
             <a:picLocks noChangeAspect="1"/>
           </p:cNvPicPr>
@@ -8852,8 +10565,8 @@
         </p:blipFill>
         <p:spPr>
           <a:xfrm>
-            <a:off x="640080" y="2103120"/>
-            <a:ext cx="7772400" cy="4663440"/>
+            <a:off x="365760" y="2011680"/>
+            <a:ext cx="7680960" cy="3950208"/>
           </a:xfrm>
           <a:prstGeom prst="rect">
             <a:avLst/>
@@ -8868,8 +10581,8 @@
         </p:nvSpPr>
         <p:spPr>
           <a:xfrm>
-            <a:off x="8595360" y="2286000"/>
-            <a:ext cx="3108960" cy="4114800"/>
+            <a:off x="8229600" y="2103120"/>
+            <a:ext cx="3657600" cy="4297680"/>
           </a:xfrm>
           <a:prstGeom prst="rect">
             <a:avLst/>
@@ -8888,7 +10601,7 @@
               </a:spcAft>
             </a:pPr>
             <a:r>
-              <a:rPr sz="1500" b="1">
+              <a:rPr sz="1400" b="1">
                 <a:solidFill>
                   <a:srgbClr val="2E8B57"/>
                 </a:solidFill>
@@ -8897,13 +10610,13 @@
               <a:t>▎ </a:t>
             </a:r>
             <a:r>
-              <a:rPr sz="1500">
+              <a:rPr sz="1400">
                 <a:solidFill>
                   <a:srgbClr val="1F2A24"/>
                 </a:solidFill>
                 <a:latin typeface="Calibri"/>
               </a:rPr>
-              <a:t>−40% por fase activada.</a:t>
+              <a:t>IoT Core: 1 $/M mensajes MQTT.</a:t>
             </a:r>
           </a:p>
           <a:p>
@@ -8913,7 +10626,7 @@
               </a:spcAft>
             </a:pPr>
             <a:r>
-              <a:rPr sz="1500" b="1">
+              <a:rPr sz="1400" b="1">
                 <a:solidFill>
                   <a:srgbClr val="2E8B57"/>
                 </a:solidFill>
@@ -8922,13 +10635,13 @@
               <a:t>▎ </a:t>
             </a:r>
             <a:r>
-              <a:rPr sz="1500">
+              <a:rPr sz="1400">
                 <a:solidFill>
                   <a:srgbClr val="1F2A24"/>
                 </a:solidFill>
                 <a:latin typeface="Calibri"/>
               </a:rPr>
-              <a:t>Reducción proporcional de €/h.</a:t>
+              <a:t>Timestream: writes + memory store + queries.</a:t>
             </a:r>
           </a:p>
           <a:p>
@@ -8938,7 +10651,7 @@
               </a:spcAft>
             </a:pPr>
             <a:r>
-              <a:rPr sz="1500" b="1">
+              <a:rPr sz="1400" b="1">
                 <a:solidFill>
                   <a:srgbClr val="2E8B57"/>
                 </a:solidFill>
@@ -8947,13 +10660,13 @@
               <a:t>▎ </a:t>
             </a:r>
             <a:r>
-              <a:rPr sz="1500">
+              <a:rPr sz="1400">
                 <a:solidFill>
                   <a:srgbClr val="1F2A24"/>
                 </a:solidFill>
                 <a:latin typeface="Calibri"/>
               </a:rPr>
-              <a:t>Menos huella de CO₂ inmediata.</a:t>
+              <a:t>Lambda: ms de cómputo por anomalía.</a:t>
             </a:r>
           </a:p>
           <a:p>
@@ -8963,7 +10676,7 @@
               </a:spcAft>
             </a:pPr>
             <a:r>
-              <a:rPr sz="1500" b="1">
+              <a:rPr sz="1400" b="1">
                 <a:solidFill>
                   <a:srgbClr val="2E8B57"/>
                 </a:solidFill>
@@ -8972,13 +10685,13 @@
               <a:t>▎ </a:t>
             </a:r>
             <a:r>
-              <a:rPr sz="1500">
+              <a:rPr sz="1400">
                 <a:solidFill>
                   <a:srgbClr val="1F2A24"/>
                 </a:solidFill>
                 <a:latin typeface="Calibri"/>
               </a:rPr>
-              <a:t>Sin tocar servidores críticos.</a:t>
+              <a:t>Fargate: vCPU/GB-h del Streamlit.</a:t>
             </a:r>
           </a:p>
           <a:p>
@@ -8988,7 +10701,7 @@
               </a:spcAft>
             </a:pPr>
             <a:r>
-              <a:rPr sz="1500" b="1">
+              <a:rPr sz="1400" b="1">
                 <a:solidFill>
                   <a:srgbClr val="2E8B57"/>
                 </a:solidFill>
@@ -8997,13 +10710,73 @@
               <a:t>▎ </a:t>
             </a:r>
             <a:r>
-              <a:rPr sz="1500">
+              <a:rPr sz="1400">
                 <a:solidFill>
                   <a:srgbClr val="1F2A24"/>
                 </a:solidFill>
                 <a:latin typeface="Calibri"/>
               </a:rPr>
-              <a:t>Auditable: cada acción queda registrada.</a:t>
+              <a:t>CloudFront, Cognito y S3: tráfico y auth.</a:t>
+            </a:r>
+          </a:p>
+          <a:p>
+            <a:pPr algn="l">
+              <a:spcAft>
+                <a:spcPts val="800"/>
+              </a:spcAft>
+            </a:pPr>
+            <a:r>
+              <a:rPr sz="1400" b="1">
+                <a:solidFill>
+                  <a:srgbClr val="2E8B57"/>
+                </a:solidFill>
+                <a:latin typeface="Calibri"/>
+              </a:rPr>
+              <a:t>▎ </a:t>
+            </a:r>
+            <a:r>
+              <a:rPr sz="1400">
+                <a:solidFill>
+                  <a:srgbClr val="1F2A24"/>
+                </a:solidFill>
+                <a:latin typeface="Calibri"/>
+              </a:rPr>
+              <a:t>Reservas y Savings Plans bajan 20-40%.</a:t>
+            </a:r>
+          </a:p>
+        </p:txBody>
+      </p:sp>
+      <p:sp>
+        <p:nvSpPr>
+          <p:cNvPr id="11" name="TextBox 10"/>
+          <p:cNvSpPr txBox="1"/>
+          <p:nvPr/>
+        </p:nvSpPr>
+        <p:spPr>
+          <a:xfrm>
+            <a:off x="457200" y="6080760"/>
+            <a:ext cx="11247120" cy="320040"/>
+          </a:xfrm>
+          <a:prstGeom prst="rect">
+            <a:avLst/>
+          </a:prstGeom>
+          <a:noFill/>
+        </p:spPr>
+        <p:txBody>
+          <a:bodyPr wrap="square" anchor="t" lIns="0" rIns="0" tIns="0" bIns="0">
+            <a:spAutoFit/>
+          </a:bodyPr>
+          <a:lstStyle/>
+          <a:p>
+            <a:pPr algn="l"/>
+            <a:r>
+              <a:rPr sz="1000" b="0">
+                <a:solidFill>
+                  <a:srgbClr val="4B5A52"/>
+                </a:solidFill>
+                <a:latin typeface="Calibri"/>
+              </a:rPr>
+              <a:t>Cifras orientativas. La calculadora oficial de AWS las afina por carga real.</a:t>
             </a:r>
           </a:p>
         </p:txBody>
@@ -9334,4 +11107,324 @@
   </a:objectDefaults>
   <a:extraClrSchemeLst/>
 </a:theme>
+</file>
+
+<file path=ppt/theme/theme2.xml><?xml version="1.0" encoding="utf-8"?>
+<a:theme xmlns:a="http://schemas.openxmlformats.org/drawingml/2006/main" name="Office Theme">
+  <a:themeElements>
+    <a:clrScheme name="Office">
+      <a:dk1>
+        <a:sysClr val="windowText" lastClr="000000"/>
+      </a:dk1>
+      <a:lt1>
+        <a:sysClr val="window" lastClr="FFFFFF"/>
+      </a:lt1>
+      <a:dk2>
+        <a:srgbClr val="1F497D"/>
+      </a:dk2>
+      <a:lt2>
+        <a:srgbClr val="EEECE1"/>
+      </a:lt2>
+      <a:accent1>
+        <a:srgbClr val="4F81BD"/>
+      </a:accent1>
+      <a:accent2>
+        <a:srgbClr val="C0504D"/>
+      </a:accent2>
+      <a:accent3>
+        <a:srgbClr val="9BBB59"/>
+      </a:accent3>
+      <a:accent4>
+        <a:srgbClr val="8064A2"/>
+      </a:accent4>
+      <a:accent5>
+        <a:srgbClr val="4BACC6"/>
+      </a:accent5>
+      <a:accent6>
+        <a:srgbClr val="F79646"/>
+      </a:accent6>
+      <a:hlink>
+        <a:srgbClr val="0000FF"/>
+      </a:hlink>
+      <a:folHlink>
+        <a:srgbClr val="800080"/>
+      </a:folHlink>
+    </a:clrScheme>
+    <a:fontScheme name="Office">
+      <a:majorFont>
+        <a:latin typeface="Calibri"/>
+        <a:ea typeface=""/>
+        <a:cs typeface=""/>
+        <a:font script="Jpan" typeface="ＭＳ Ｐゴシック"/>
+        <a:font script="Hang" typeface="맑은 고딕"/>
+        <a:font script="Hans" typeface="宋体"/>
+        <a:font script="Hant" typeface="新細明體"/>
+        <a:font script="Arab" typeface="Times New Roman"/>
+        <a:font script="Hebr" typeface="Times New Roman"/>
+        <a:font script="Thai" typeface="Angsana New"/>
+        <a:font script="Ethi" typeface="Nyala"/>
+        <a:font script="Beng" typeface="Vrinda"/>
+        <a:font script="Gujr" typeface="Shruti"/>
+        <a:font script="Khmr" typeface="MoolBoran"/>
+        <a:font script="Knda" typeface="Tunga"/>
+        <a:font script="Guru" typeface="Raavi"/>
+        <a:font script="Cans" typeface="Euphemia"/>
+        <a:font script="Cher" typeface="Plantagenet Cherokee"/>
+        <a:font script="Yiii" typeface="Microsoft Yi Baiti"/>
+        <a:font script="Tibt" typeface="Microsoft Himalaya"/>
+        <a:font script="Thaa" typeface="MV Boli"/>
+        <a:font script="Deva" typeface="Mangal"/>
+        <a:font script="Telu" typeface="Gautami"/>
+        <a:font script="Taml" typeface="Latha"/>
+        <a:font script="Syrc" typeface="Estrangelo Edessa"/>
+        <a:font script="Orya" typeface="Kalinga"/>
+        <a:font script="Mlym" typeface="Kartika"/>
+        <a:font script="Laoo" typeface="DokChampa"/>
+        <a:font script="Sinh" typeface="Iskoola Pota"/>
+        <a:font script="Mong" typeface="Mongolian Baiti"/>
+        <a:font script="Viet" typeface="Times New Roman"/>
+        <a:font script="Uigh" typeface="Microsoft Uighur"/>
+        <a:font script="Geor" typeface="Sylfaen"/>
+      </a:majorFont>
+      <a:minorFont>
+        <a:latin typeface="Calibri"/>
+        <a:ea typeface=""/>
+        <a:cs typeface=""/>
+        <a:font script="Jpan" typeface="ＭＳ Ｐゴシック"/>
+        <a:font script="Hang" typeface="맑은 고딕"/>
+        <a:font script="Hans" typeface="宋体"/>
+        <a:font script="Hant" typeface="新細明體"/>
+        <a:font script="Arab" typeface="Arial"/>
+        <a:font script="Hebr" typeface="Arial"/>
+        <a:font script="Thai" typeface="Cordia New"/>
+        <a:font script="Ethi" typeface="Nyala"/>
+        <a:font script="Beng" typeface="Vrinda"/>
+        <a:font script="Gujr" typeface="Shruti"/>
+        <a:font script="Khmr" typeface="DaunPenh"/>
+        <a:font script="Knda" typeface="Tunga"/>
+        <a:font script="Guru" typeface="Raavi"/>
+        <a:font script="Cans" typeface="Euphemia"/>
+        <a:font script="Cher" typeface="Plantagenet Cherokee"/>
+        <a:font script="Yiii" typeface="Microsoft Yi Baiti"/>
+        <a:font script="Tibt" typeface="Microsoft Himalaya"/>
+        <a:font script="Thaa" typeface="MV Boli"/>
+        <a:font script="Deva" typeface="Mangal"/>
+        <a:font script="Telu" typeface="Gautami"/>
+        <a:font script="Taml" typeface="Latha"/>
+        <a:font script="Syrc" typeface="Estrangelo Edessa"/>
+        <a:font script="Orya" typeface="Kalinga"/>
+        <a:font script="Mlym" typeface="Kartika"/>
+        <a:font script="Laoo" typeface="DokChampa"/>
+        <a:font script="Sinh" typeface="Iskoola Pota"/>
+        <a:font script="Mong" typeface="Mongolian Baiti"/>
+        <a:font script="Viet" typeface="Arial"/>
+        <a:font script="Uigh" typeface="Microsoft Uighur"/>
+        <a:font script="Geor" typeface="Sylfaen"/>
+      </a:minorFont>
+    </a:fontScheme>
+    <a:fmtScheme name="Office">
+      <a:fillStyleLst>
+        <a:solidFill>
+          <a:schemeClr val="phClr"/>
+        </a:solidFill>
+        <a:gradFill rotWithShape="1">
+          <a:gsLst>
+            <a:gs pos="0">
+              <a:schemeClr val="phClr">
+                <a:tint val="50000"/>
+                <a:satMod val="300000"/>
+              </a:schemeClr>
+            </a:gs>
+            <a:gs pos="35000">
+              <a:schemeClr val="phClr">
+                <a:tint val="37000"/>
+                <a:satMod val="300000"/>
+              </a:schemeClr>
+            </a:gs>
+            <a:gs pos="100000">
+              <a:schemeClr val="phClr">
+                <a:tint val="15000"/>
+                <a:satMod val="350000"/>
+              </a:schemeClr>
+            </a:gs>
+          </a:gsLst>
+          <a:lin ang="16200000" scaled="1"/>
+        </a:gradFill>
+        <a:gradFill rotWithShape="1">
+          <a:gsLst>
+            <a:gs pos="0">
+              <a:schemeClr val="phClr">
+                <a:tint val="100000"/>
+                <a:shade val="100000"/>
+                <a:satMod val="130000"/>
+              </a:schemeClr>
+            </a:gs>
+            <a:gs pos="100000">
+              <a:schemeClr val="phClr">
+                <a:tint val="50000"/>
+                <a:shade val="100000"/>
+                <a:satMod val="350000"/>
+              </a:schemeClr>
+            </a:gs>
+          </a:gsLst>
+          <a:lin ang="16200000" scaled="0"/>
+        </a:gradFill>
+      </a:fillStyleLst>
+      <a:lnStyleLst>
+        <a:ln w="9525" cap="flat" cmpd="sng" algn="ctr">
+          <a:solidFill>
+            <a:schemeClr val="phClr">
+              <a:shade val="95000"/>
+              <a:satMod val="105000"/>
+            </a:schemeClr>
+          </a:solidFill>
+          <a:prstDash val="solid"/>
+        </a:ln>
+        <a:ln w="25400" cap="flat" cmpd="sng" algn="ctr">
+          <a:solidFill>
+            <a:schemeClr val="phClr"/>
+          </a:solidFill>
+          <a:prstDash val="solid"/>
+        </a:ln>
+        <a:ln w="38100" cap="flat" cmpd="sng" algn="ctr">
+          <a:solidFill>
+            <a:schemeClr val="phClr"/>
+          </a:solidFill>
+          <a:prstDash val="solid"/>
+        </a:ln>
+      </a:lnStyleLst>
+      <a:effectStyleLst>
+        <a:effectStyle>
+          <a:effectLst>
+            <a:outerShdw blurRad="40000" dist="20000" dir="5400000" rotWithShape="0">
+              <a:srgbClr val="000000">
+                <a:alpha val="38000"/>
+              </a:srgbClr>
+            </a:outerShdw>
+          </a:effectLst>
+        </a:effectStyle>
+        <a:effectStyle>
+          <a:effectLst>
+            <a:outerShdw blurRad="40000" dist="23000" dir="5400000" rotWithShape="0">
+              <a:srgbClr val="000000">
+                <a:alpha val="35000"/>
+              </a:srgbClr>
+            </a:outerShdw>
+          </a:effectLst>
+        </a:effectStyle>
+        <a:effectStyle>
+          <a:effectLst>
+            <a:outerShdw blurRad="40000" dist="23000" dir="5400000" rotWithShape="0">
+              <a:srgbClr val="000000">
+                <a:alpha val="35000"/>
+              </a:srgbClr>
+            </a:outerShdw>
+          </a:effectLst>
+          <a:scene3d>
+            <a:camera prst="orthographicFront">
+              <a:rot lat="0" lon="0" rev="0"/>
+            </a:camera>
+            <a:lightRig rig="threePt" dir="t">
+              <a:rot lat="0" lon="0" rev="1200000"/>
+            </a:lightRig>
+          </a:scene3d>
+          <a:sp3d>
+            <a:bevelT w="63500" h="25400"/>
+          </a:sp3d>
+        </a:effectStyle>
+      </a:effectStyleLst>
+      <a:bgFillStyleLst>
+        <a:solidFill>
+          <a:schemeClr val="phClr"/>
+        </a:solidFill>
+        <a:gradFill rotWithShape="1">
+          <a:gsLst>
+            <a:gs pos="0">
+              <a:schemeClr val="phClr">
+                <a:tint val="40000"/>
+                <a:satMod val="350000"/>
+              </a:schemeClr>
+            </a:gs>
+            <a:gs pos="40000">
+              <a:schemeClr val="phClr">
+                <a:tint val="45000"/>
+                <a:shade val="99000"/>
+                <a:satMod val="350000"/>
+              </a:schemeClr>
+            </a:gs>
+            <a:gs pos="100000">
+              <a:schemeClr val="phClr">
+                <a:shade val="20000"/>
+                <a:satMod val="255000"/>
+              </a:schemeClr>
+            </a:gs>
+          </a:gsLst>
+          <a:path path="circle">
+            <a:fillToRect l="50000" t="-80000" r="50000" b="180000"/>
+          </a:path>
+        </a:gradFill>
+        <a:gradFill rotWithShape="1">
+          <a:gsLst>
+            <a:gs pos="0">
+              <a:schemeClr val="phClr">
+                <a:tint val="80000"/>
+                <a:satMod val="300000"/>
+              </a:schemeClr>
+            </a:gs>
+            <a:gs pos="100000">
+              <a:schemeClr val="phClr">
+                <a:shade val="30000"/>
+                <a:satMod val="200000"/>
+              </a:schemeClr>
+            </a:gs>
+          </a:gsLst>
+          <a:path path="circle">
+            <a:fillToRect l="50000" t="50000" r="50000" b="50000"/>
+          </a:path>
+        </a:gradFill>
+      </a:bgFillStyleLst>
+    </a:fmtScheme>
+  </a:themeElements>
+  <a:objectDefaults>
+    <a:spDef>
+      <a:spPr/>
+      <a:bodyPr/>
+      <a:lstStyle/>
+      <a:style>
+        <a:lnRef idx="1">
+          <a:schemeClr val="accent1"/>
+        </a:lnRef>
+        <a:fillRef idx="3">
+          <a:schemeClr val="accent1"/>
+        </a:fillRef>
+        <a:effectRef idx="2">
+          <a:schemeClr val="accent1"/>
+        </a:effectRef>
+        <a:fontRef idx="minor">
+          <a:schemeClr val="lt1"/>
+        </a:fontRef>
+      </a:style>
+    </a:spDef>
+    <a:lnDef>
+      <a:spPr/>
+      <a:bodyPr/>
+      <a:lstStyle/>
+      <a:style>
+        <a:lnRef idx="2">
+          <a:schemeClr val="accent1"/>
+        </a:lnRef>
+        <a:fillRef idx="0">
+          <a:schemeClr val="accent1"/>
+        </a:fillRef>
+        <a:effectRef idx="1">
+          <a:schemeClr val="accent1"/>
+        </a:effectRef>
+        <a:fontRef idx="minor">
+          <a:schemeClr val="tx1"/>
+        </a:fontRef>
+      </a:style>
+    </a:lnDef>
+  </a:objectDefaults>
+  <a:extraClrSchemeLst/>
+</a:theme>
 </file>
--- a/presentations/energy_hunter_pitch.pptx
+++ b/presentations/energy_hunter_pitch.pptx
@@ -514,7 +514,7 @@
           <a:lstStyle/>
           <a:p>
             <a:r>
-              <a:t>Hola, somos el equipo de Energy Hunter. En los próximos cinco minutos vais a ver una herramienta B2B que ayuda a edificios y empresas a consumir menos energía y emitir menos CO2, con un solo clic. Menos consumo, menos emisiones, más control.</a:t>
+              <a:t>Hola, somos el equipo de Smart Energy Control. En los próximos cinco minutos vais a ver una herramienta B2B que ayuda a edificios y empresas a consumir menos energía y emitir menos CO2, con un solo clic. Menos consumo, menos emisiones, más control.</a:t>
             </a:r>
           </a:p>
         </p:txBody>
@@ -794,7 +794,7 @@
           <a:lstStyle/>
           <a:p>
             <a:r>
-              <a:t>Energía bajo control, naturaleza protegida. Energy Hunter convierte cada edificio en un actor activo del ahorro. Estamos abiertos a preguntas y tenemos demo en vivo lista. Gracias.</a:t>
+              <a:t>Energía bajo control, naturaleza protegida. Smart Energy Control convierte cada edificio en un actor activo del ahorro. Estamos abiertos a preguntas y tenemos demo en vivo lista. Gracias.</a:t>
             </a:r>
           </a:p>
         </p:txBody>
@@ -934,7 +934,7 @@
           <a:lstStyle/>
           <a:p>
             <a:r>
-              <a:t>Energy Hunter cierra ese hueco. Es un panel hecho en Streamlit que recibe telemetría cada 30 segundos por fase, muestra los edificios en mapa, calcula el coste con el precio del mercado SIOS y marca cualquier consumo anómalo. Ve, alerta, y en la siguiente diapositiva veréis cómo actúa.</a:t>
+              <a:t>Smart Energy Control cierra ese hueco. Es un panel hecho en Streamlit que recibe telemetría cada 30 segundos por fase, muestra los edificios en mapa, calcula el coste con el precio del mercado SIOS y marca cualquier consumo anómalo. Ve, alerta, y en la siguiente diapositiva veréis cómo actúa.</a:t>
             </a:r>
           </a:p>
         </p:txBody>
@@ -4501,7 +4501,7 @@
                 </a:solidFill>
                 <a:latin typeface="Calibri"/>
               </a:rPr>
-              <a:t>Energy Hunter</a:t>
+              <a:t>Smart Energy Control</a:t>
             </a:r>
           </a:p>
         </p:txBody>
@@ -4929,7 +4929,7 @@
                 </a:solidFill>
                 <a:latin typeface="Calibri"/>
               </a:rPr>
-              <a:t>Energy Hunter · Hackathon Demo</a:t>
+              <a:t>Smart Energy Control · Hackathon Demo</a:t>
             </a:r>
           </a:p>
         </p:txBody>
@@ -5381,7 +5381,7 @@
                 </a:solidFill>
                 <a:latin typeface="Calibri"/>
               </a:rPr>
-              <a:t>Energy Hunter · Hackathon Demo</a:t>
+              <a:t>Smart Energy Control · Hackathon Demo</a:t>
             </a:r>
           </a:p>
         </p:txBody>
@@ -5685,7 +5685,7 @@
                 </a:solidFill>
                 <a:latin typeface="Calibri"/>
               </a:rPr>
-              <a:t>Energy Hunter · Hackathon Demo</a:t>
+              <a:t>Smart Energy Control · Hackathon Demo</a:t>
             </a:r>
           </a:p>
         </p:txBody>
@@ -6000,7 +6000,7 @@
                 </a:solidFill>
                 <a:latin typeface="Calibri"/>
               </a:rPr>
-              <a:t>Energy Hunter convierte cada edificio en un actor activo del ahorro.</a:t>
+              <a:t>Smart Energy Control convierte cada edificio en un actor activo del ahorro.</a:t>
             </a:r>
           </a:p>
         </p:txBody>
@@ -6622,7 +6622,7 @@
                 </a:solidFill>
                 <a:latin typeface="Calibri"/>
               </a:rPr>
-              <a:t>Energy Hunter · Hackathon Demo</a:t>
+              <a:t>Smart Energy Control · Hackathon Demo</a:t>
             </a:r>
           </a:p>
         </p:txBody>
@@ -7049,7 +7049,7 @@
                 </a:solidFill>
                 <a:latin typeface="Calibri"/>
               </a:rPr>
-              <a:t>Energy Hunter · Hackathon Demo</a:t>
+              <a:t>Smart Energy Control · Hackathon Demo</a:t>
             </a:r>
           </a:p>
         </p:txBody>
@@ -7406,7 +7406,7 @@
                 </a:solidFill>
                 <a:latin typeface="Calibri"/>
               </a:rPr>
-              <a:t>Por qué Energy Hunter mueve la aguja</a:t>
+              <a:t>Por qué Smart Energy Control mueve la aguja</a:t>
             </a:r>
           </a:p>
         </p:txBody>
@@ -7476,7 +7476,7 @@
                 </a:solidFill>
                 <a:latin typeface="Calibri"/>
               </a:rPr>
-              <a:t>Energy Hunter · Hackathon Demo</a:t>
+              <a:t>Smart Energy Control · Hackathon Demo</a:t>
             </a:r>
           </a:p>
         </p:txBody>
@@ -8704,7 +8704,7 @@
                 </a:solidFill>
                 <a:latin typeface="Calibri"/>
               </a:rPr>
-              <a:t>Energy Hunter · Hackathon Demo</a:t>
+              <a:t>Smart Energy Control · Hackathon Demo</a:t>
             </a:r>
           </a:p>
         </p:txBody>
@@ -9181,7 +9181,7 @@
                 </a:solidFill>
                 <a:latin typeface="Calibri"/>
               </a:rPr>
-              <a:t>Energy Hunter · Hackathon Demo</a:t>
+              <a:t>Smart Energy Control · Hackathon Demo</a:t>
             </a:r>
           </a:p>
         </p:txBody>
@@ -9450,7 +9450,7 @@
                 </a:solidFill>
                 <a:latin typeface="Calibri"/>
               </a:rPr>
-              <a:t>Cómo se escala Energy Hunter en AWS con IoT Core</a:t>
+              <a:t>Cómo se escala Smart Energy Control en AWS con IoT Core</a:t>
             </a:r>
           </a:p>
         </p:txBody>
@@ -9520,7 +9520,7 @@
                 </a:solidFill>
                 <a:latin typeface="Calibri"/>
               </a:rPr>
-              <a:t>Energy Hunter · Hackathon Demo</a:t>
+              <a:t>Smart Energy Control · Hackathon Demo</a:t>
             </a:r>
           </a:p>
         </p:txBody>
@@ -9997,7 +9997,7 @@
                 </a:solidFill>
                 <a:latin typeface="Calibri"/>
               </a:rPr>
-              <a:t>Energy Hunter · Hackathon Demo</a:t>
+              <a:t>Smart Energy Control · Hackathon Demo</a:t>
             </a:r>
           </a:p>
         </p:txBody>
@@ -10509,7 +10509,7 @@
                 </a:solidFill>
                 <a:latin typeface="Calibri"/>
               </a:rPr>
-              <a:t>Energy Hunter · Hackathon Demo</a:t>
+              <a:t>Smart Energy Control · Hackathon Demo</a:t>
             </a:r>
           </a:p>
         </p:txBody>
